--- a/AI-industry-chain-editable-16x9.pptx
+++ b/AI-industry-chain-editable-16x9.pptx
@@ -6,7 +6,6 @@
   </p:sldMasterIdLst>
   <p:sldIdLst>
     <p:sldId id="256" r:id="rId7"/>
-    <p:sldId id="257" r:id="rId8"/>
   </p:sldIdLst>
   <p:sldSz cx="12191695" cy="6858000" type="screen4x3"/>
   <p:notesSz cx="6858000" cy="9144000"/>
@@ -3141,7 +3140,7 @@
         <p:spPr>
           <a:xfrm>
             <a:off x="0" y="0"/>
-            <a:ext cx="12191695" cy="1417320"/>
+            <a:ext cx="12191695" cy="1325880"/>
           </a:xfrm>
           <a:prstGeom prst="rect">
             <a:avLst/>
@@ -3183,8 +3182,8 @@
         </p:nvSpPr>
         <p:spPr>
           <a:xfrm>
-            <a:off x="411480" y="256032"/>
-            <a:ext cx="11155680" cy="594360"/>
+            <a:off x="365760" y="228600"/>
+            <a:ext cx="11338560" cy="548640"/>
           </a:xfrm>
           <a:prstGeom prst="rect">
             <a:avLst/>
@@ -3198,6 +3197,9 @@
           <a:lstStyle/>
           <a:p>
             <a:pPr algn="l">
+              <a:spcAft>
+                <a:spcPts val="200"/>
+              </a:spcAft>
               <a:defRPr sz="2800" b="1">
                 <a:solidFill>
                   <a:srgbClr val="FFFFFF"/>
@@ -3219,8 +3221,8 @@
         </p:nvSpPr>
         <p:spPr>
           <a:xfrm>
-            <a:off x="411480" y="868680"/>
-            <a:ext cx="11155680" cy="365760"/>
+            <a:off x="365760" y="822960"/>
+            <a:ext cx="11338560" cy="365760"/>
           </a:xfrm>
           <a:prstGeom prst="rect">
             <a:avLst/>
@@ -3234,7 +3236,10 @@
           <a:lstStyle/>
           <a:p>
             <a:pPr algn="l">
-              <a:defRPr sz="1600" b="0">
+              <a:spcAft>
+                <a:spcPts val="200"/>
+              </a:spcAft>
+              <a:defRPr sz="1500" b="0">
                 <a:solidFill>
                   <a:srgbClr val="B4BED2"/>
                 </a:solidFill>
@@ -3255,16 +3260,18 @@
         </p:nvSpPr>
         <p:spPr>
           <a:xfrm>
-            <a:off x="320040" y="1600200"/>
-            <a:ext cx="2178649" cy="3977639"/>
+            <a:off x="274320" y="1508760"/>
+            <a:ext cx="2211567" cy="4114800"/>
           </a:xfrm>
           <a:prstGeom prst="roundRect">
-            <a:avLst/>
+            <a:avLst>
+              <a:gd name="adj" fmla="val 8000"/>
+            </a:avLst>
           </a:prstGeom>
           <a:solidFill>
             <a:srgbClr val="0E1C32"/>
           </a:solidFill>
-          <a:ln>
+          <a:ln w="12700">
             <a:solidFill>
               <a:srgbClr val="1E375A"/>
             </a:solidFill>
@@ -3300,8 +3307,8 @@
         </p:nvSpPr>
         <p:spPr>
           <a:xfrm>
-            <a:off x="411480" y="1709928"/>
-            <a:ext cx="1995769" cy="384048"/>
+            <a:off x="347472" y="1618488"/>
+            <a:ext cx="2065263" cy="365760"/>
           </a:xfrm>
           <a:prstGeom prst="rect">
             <a:avLst/>
@@ -3315,7 +3322,10 @@
           <a:lstStyle/>
           <a:p>
             <a:pPr algn="ctr">
-              <a:defRPr sz="2000" b="1">
+              <a:spcAft>
+                <a:spcPts val="200"/>
+              </a:spcAft>
+              <a:defRPr sz="1800" b="1">
                 <a:solidFill>
                   <a:srgbClr val="FFFFFF"/>
                 </a:solidFill>
@@ -3336,8 +3346,8 @@
         </p:nvSpPr>
         <p:spPr>
           <a:xfrm>
-            <a:off x="393192" y="2130552"/>
-            <a:ext cx="2032345" cy="658368"/>
+            <a:off x="347472" y="1984248"/>
+            <a:ext cx="2065263" cy="640080"/>
           </a:xfrm>
           <a:prstGeom prst="rect">
             <a:avLst/>
@@ -3351,7 +3361,10 @@
           <a:lstStyle/>
           <a:p>
             <a:pPr algn="ctr">
-              <a:defRPr sz="1200" b="0">
+              <a:spcAft>
+                <a:spcPts val="200"/>
+              </a:spcAft>
+              <a:defRPr sz="1100" b="0">
                 <a:solidFill>
                   <a:srgbClr val="B4BED2"/>
                 </a:solidFill>
@@ -3361,32 +3374,96 @@
             <a:r>
               <a:t>生于硅片，GPU 与 HBM</a:t>
             </a:r>
-            <a:br/>
+          </a:p>
+          <a:p>
+            <a:pPr algn="ctr">
+              <a:spcAft>
+                <a:spcPts val="200"/>
+              </a:spcAft>
+              <a:defRPr sz="1100" b="0">
+                <a:solidFill>
+                  <a:srgbClr val="B4BED2"/>
+                </a:solidFill>
+                <a:latin typeface="Microsoft YaHei"/>
+              </a:defRPr>
+            </a:pPr>
             <a:r>
               <a:t>驱动一切。</a:t>
             </a:r>
           </a:p>
         </p:txBody>
       </p:sp>
-      <p:sp>
-        <p:nvSpPr>
-          <p:cNvPr id="9" name="Oval 8"/>
+      <p:pic>
+        <p:nvPicPr>
+          <p:cNvPr id="9" name="Picture 8" descr="01-compute.png"/>
+          <p:cNvPicPr>
+            <a:picLocks noChangeAspect="1"/>
+          </p:cNvPicPr>
+          <p:nvPr/>
+        </p:nvPicPr>
+        <p:blipFill>
+          <a:blip r:embed="rId2"/>
+          <a:stretch>
+            <a:fillRect/>
+          </a:stretch>
+        </p:blipFill>
+        <p:spPr>
+          <a:xfrm>
+            <a:off x="1050919" y="2697480"/>
+            <a:ext cx="658368" cy="658368"/>
+          </a:xfrm>
+          <a:prstGeom prst="rect">
+            <a:avLst/>
+          </a:prstGeom>
+        </p:spPr>
+      </p:pic>
+      <p:pic>
+        <p:nvPicPr>
+          <p:cNvPr id="10" name="Picture 9" descr="01-compute.png"/>
+          <p:cNvPicPr>
+            <a:picLocks noChangeAspect="1"/>
+          </p:cNvPicPr>
+          <p:nvPr/>
+        </p:nvPicPr>
+        <p:blipFill>
+          <a:blip r:embed="rId3"/>
+          <a:stretch>
+            <a:fillRect/>
+          </a:stretch>
+        </p:blipFill>
+        <p:spPr>
+          <a:xfrm>
+            <a:off x="384048" y="3520440"/>
+            <a:ext cx="1992111" cy="1874519"/>
+          </a:xfrm>
+          <a:prstGeom prst="rect">
+            <a:avLst/>
+          </a:prstGeom>
+        </p:spPr>
+      </p:pic>
+      <p:sp>
+        <p:nvSpPr>
+          <p:cNvPr id="11" name="Rounded Rectangle 10"/>
           <p:cNvSpPr/>
           <p:nvPr/>
         </p:nvSpPr>
         <p:spPr>
           <a:xfrm>
-            <a:off x="1098468" y="2953512"/>
-            <a:ext cx="621792" cy="621792"/>
-          </a:xfrm>
-          <a:prstGeom prst="ellipse">
-            <a:avLst/>
+            <a:off x="2632191" y="1508760"/>
+            <a:ext cx="2211567" cy="4114800"/>
+          </a:xfrm>
+          <a:prstGeom prst="roundRect">
+            <a:avLst>
+              <a:gd name="adj" fmla="val 8000"/>
+            </a:avLst>
           </a:prstGeom>
           <a:solidFill>
-            <a:srgbClr val="3B82F6"/>
+            <a:srgbClr val="0E1C32"/>
           </a:solidFill>
-          <a:ln>
-            <a:noFill/>
+          <a:ln w="12700">
+            <a:solidFill>
+              <a:srgbClr val="1E375A"/>
+            </a:solidFill>
           </a:ln>
         </p:spPr>
         <p:style>
@@ -3413,14 +3490,14 @@
       </p:sp>
       <p:sp>
         <p:nvSpPr>
-          <p:cNvPr id="10" name="TextBox 9"/>
+          <p:cNvPr id="12" name="TextBox 11"/>
           <p:cNvSpPr txBox="1"/>
           <p:nvPr/>
         </p:nvSpPr>
         <p:spPr>
           <a:xfrm>
-            <a:off x="1098468" y="3044952"/>
-            <a:ext cx="621792" cy="438912"/>
+            <a:off x="2705343" y="1618488"/>
+            <a:ext cx="2065263" cy="365760"/>
           </a:xfrm>
           <a:prstGeom prst="rect">
             <a:avLst/>
@@ -3428,13 +3505,16 @@
           <a:noFill/>
         </p:spPr>
         <p:txBody>
-          <a:bodyPr wrap="square" anchor="ctr">
+          <a:bodyPr wrap="square" anchor="t">
             <a:spAutoFit/>
           </a:bodyPr>
           <a:lstStyle/>
           <a:p>
             <a:pPr algn="ctr">
-              <a:defRPr sz="2200" b="1">
+              <a:spcAft>
+                <a:spcPts val="200"/>
+              </a:spcAft>
+              <a:defRPr sz="1800" b="1">
                 <a:solidFill>
                   <a:srgbClr val="FFFFFF"/>
                 </a:solidFill>
@@ -3442,53 +3522,134 @@
               </a:defRPr>
             </a:pPr>
             <a:r>
-              <a:t>芯</a:t>
+              <a:t>基础设施层</a:t>
+            </a:r>
+          </a:p>
+        </p:txBody>
+      </p:sp>
+      <p:sp>
+        <p:nvSpPr>
+          <p:cNvPr id="13" name="TextBox 12"/>
+          <p:cNvSpPr txBox="1"/>
+          <p:nvPr/>
+        </p:nvSpPr>
+        <p:spPr>
+          <a:xfrm>
+            <a:off x="2705343" y="1984248"/>
+            <a:ext cx="2065263" cy="640080"/>
+          </a:xfrm>
+          <a:prstGeom prst="rect">
+            <a:avLst/>
+          </a:prstGeom>
+          <a:noFill/>
+        </p:spPr>
+        <p:txBody>
+          <a:bodyPr wrap="square" anchor="t">
+            <a:spAutoFit/>
+          </a:bodyPr>
+          <a:lstStyle/>
+          <a:p>
+            <a:pPr algn="ctr">
+              <a:spcAft>
+                <a:spcPts val="200"/>
+              </a:spcAft>
+              <a:defRPr sz="1100" b="0">
+                <a:solidFill>
+                  <a:srgbClr val="B4BED2"/>
+                </a:solidFill>
+                <a:latin typeface="Microsoft YaHei"/>
+              </a:defRPr>
+            </a:pPr>
+            <a:r>
+              <a:t>电力、液冷与万卡</a:t>
+            </a:r>
+          </a:p>
+          <a:p>
+            <a:pPr algn="ctr">
+              <a:spcAft>
+                <a:spcPts val="200"/>
+              </a:spcAft>
+              <a:defRPr sz="1100" b="0">
+                <a:solidFill>
+                  <a:srgbClr val="B4BED2"/>
+                </a:solidFill>
+                <a:latin typeface="Microsoft YaHei"/>
+              </a:defRPr>
+            </a:pPr>
+            <a:r>
+              <a:t>集群规模化。</a:t>
             </a:r>
           </a:p>
         </p:txBody>
       </p:sp>
       <p:pic>
         <p:nvPicPr>
-          <p:cNvPr id="11" name="Picture 10" descr="col-1.png"/>
+          <p:cNvPr id="14" name="Picture 13" descr="02-infra.png"/>
           <p:cNvPicPr>
             <a:picLocks noChangeAspect="1"/>
           </p:cNvPicPr>
           <p:nvPr/>
         </p:nvPicPr>
         <p:blipFill>
-          <a:blip r:embed="rId2"/>
+          <a:blip r:embed="rId4"/>
           <a:stretch>
             <a:fillRect/>
           </a:stretch>
         </p:blipFill>
         <p:spPr>
           <a:xfrm>
-            <a:off x="429768" y="3776472"/>
-            <a:ext cx="1959193" cy="1572768"/>
+            <a:off x="3408791" y="2697480"/>
+            <a:ext cx="658368" cy="658368"/>
           </a:xfrm>
           <a:prstGeom prst="rect">
             <a:avLst/>
           </a:prstGeom>
         </p:spPr>
       </p:pic>
-      <p:sp>
-        <p:nvSpPr>
-          <p:cNvPr id="12" name="Rounded Rectangle 11"/>
+      <p:pic>
+        <p:nvPicPr>
+          <p:cNvPr id="15" name="Picture 14" descr="02-infra.png"/>
+          <p:cNvPicPr>
+            <a:picLocks noChangeAspect="1"/>
+          </p:cNvPicPr>
+          <p:nvPr/>
+        </p:nvPicPr>
+        <p:blipFill>
+          <a:blip r:embed="rId5"/>
+          <a:stretch>
+            <a:fillRect/>
+          </a:stretch>
+        </p:blipFill>
+        <p:spPr>
+          <a:xfrm>
+            <a:off x="2741919" y="3520440"/>
+            <a:ext cx="1992111" cy="1874519"/>
+          </a:xfrm>
+          <a:prstGeom prst="rect">
+            <a:avLst/>
+          </a:prstGeom>
+        </p:spPr>
+      </p:pic>
+      <p:sp>
+        <p:nvSpPr>
+          <p:cNvPr id="16" name="Rounded Rectangle 15"/>
           <p:cNvSpPr/>
           <p:nvPr/>
         </p:nvSpPr>
         <p:spPr>
           <a:xfrm>
-            <a:off x="2663281" y="1600200"/>
-            <a:ext cx="2178649" cy="3977639"/>
+            <a:off x="4990063" y="1508760"/>
+            <a:ext cx="2211567" cy="4114800"/>
           </a:xfrm>
           <a:prstGeom prst="roundRect">
-            <a:avLst/>
+            <a:avLst>
+              <a:gd name="adj" fmla="val 8000"/>
+            </a:avLst>
           </a:prstGeom>
           <a:solidFill>
             <a:srgbClr val="0E1C32"/>
           </a:solidFill>
-          <a:ln>
+          <a:ln w="12700">
             <a:solidFill>
               <a:srgbClr val="1E375A"/>
             </a:solidFill>
@@ -3518,14 +3679,14 @@
       </p:sp>
       <p:sp>
         <p:nvSpPr>
-          <p:cNvPr id="13" name="TextBox 12"/>
+          <p:cNvPr id="17" name="TextBox 16"/>
           <p:cNvSpPr txBox="1"/>
           <p:nvPr/>
         </p:nvSpPr>
         <p:spPr>
           <a:xfrm>
-            <a:off x="2754721" y="1709928"/>
-            <a:ext cx="1995769" cy="384048"/>
+            <a:off x="5063215" y="1618488"/>
+            <a:ext cx="2065263" cy="365760"/>
           </a:xfrm>
           <a:prstGeom prst="rect">
             <a:avLst/>
@@ -3539,7 +3700,10 @@
           <a:lstStyle/>
           <a:p>
             <a:pPr algn="ctr">
-              <a:defRPr sz="2000" b="1">
+              <a:spcAft>
+                <a:spcPts val="200"/>
+              </a:spcAft>
+              <a:defRPr sz="1800" b="1">
                 <a:solidFill>
                   <a:srgbClr val="FFFFFF"/>
                 </a:solidFill>
@@ -3547,21 +3711,21 @@
               </a:defRPr>
             </a:pPr>
             <a:r>
-              <a:t>基础设施层</a:t>
-            </a:r>
-          </a:p>
-        </p:txBody>
-      </p:sp>
-      <p:sp>
-        <p:nvSpPr>
-          <p:cNvPr id="14" name="TextBox 13"/>
+              <a:t>模型层</a:t>
+            </a:r>
+          </a:p>
+        </p:txBody>
+      </p:sp>
+      <p:sp>
+        <p:nvSpPr>
+          <p:cNvPr id="18" name="TextBox 17"/>
           <p:cNvSpPr txBox="1"/>
           <p:nvPr/>
         </p:nvSpPr>
         <p:spPr>
           <a:xfrm>
-            <a:off x="2736433" y="2130552"/>
-            <a:ext cx="2032345" cy="658368"/>
+            <a:off x="5063215" y="1984248"/>
+            <a:ext cx="2065263" cy="640080"/>
           </a:xfrm>
           <a:prstGeom prst="rect">
             <a:avLst/>
@@ -3575,7 +3739,10 @@
           <a:lstStyle/>
           <a:p>
             <a:pPr algn="ctr">
-              <a:defRPr sz="1200" b="0">
+              <a:spcAft>
+                <a:spcPts val="200"/>
+              </a:spcAft>
+              <a:defRPr sz="1100" b="0">
                 <a:solidFill>
                   <a:srgbClr val="B4BED2"/>
                 </a:solidFill>
@@ -3583,34 +3750,98 @@
               </a:defRPr>
             </a:pPr>
             <a:r>
-              <a:t>电力、液冷与万卡</a:t>
-            </a:r>
-            <a:br/>
-            <a:r>
-              <a:t>集群规模化。</a:t>
-            </a:r>
-          </a:p>
-        </p:txBody>
-      </p:sp>
-      <p:sp>
-        <p:nvSpPr>
-          <p:cNvPr id="15" name="Oval 14"/>
+              <a:t>数据训练，算力炼成</a:t>
+            </a:r>
+          </a:p>
+          <a:p>
+            <a:pPr algn="ctr">
+              <a:spcAft>
+                <a:spcPts val="200"/>
+              </a:spcAft>
+              <a:defRPr sz="1100" b="0">
+                <a:solidFill>
+                  <a:srgbClr val="B4BED2"/>
+                </a:solidFill>
+                <a:latin typeface="Microsoft YaHei"/>
+              </a:defRPr>
+            </a:pPr>
+            <a:r>
+              <a:t>认知能力。</a:t>
+            </a:r>
+          </a:p>
+        </p:txBody>
+      </p:sp>
+      <p:pic>
+        <p:nvPicPr>
+          <p:cNvPr id="19" name="Picture 18" descr="03-model.png"/>
+          <p:cNvPicPr>
+            <a:picLocks noChangeAspect="1"/>
+          </p:cNvPicPr>
+          <p:nvPr/>
+        </p:nvPicPr>
+        <p:blipFill>
+          <a:blip r:embed="rId6"/>
+          <a:stretch>
+            <a:fillRect/>
+          </a:stretch>
+        </p:blipFill>
+        <p:spPr>
+          <a:xfrm>
+            <a:off x="5766663" y="2697480"/>
+            <a:ext cx="658368" cy="658368"/>
+          </a:xfrm>
+          <a:prstGeom prst="rect">
+            <a:avLst/>
+          </a:prstGeom>
+        </p:spPr>
+      </p:pic>
+      <p:pic>
+        <p:nvPicPr>
+          <p:cNvPr id="20" name="Picture 19" descr="03-model.png"/>
+          <p:cNvPicPr>
+            <a:picLocks noChangeAspect="1"/>
+          </p:cNvPicPr>
+          <p:nvPr/>
+        </p:nvPicPr>
+        <p:blipFill>
+          <a:blip r:embed="rId7"/>
+          <a:stretch>
+            <a:fillRect/>
+          </a:stretch>
+        </p:blipFill>
+        <p:spPr>
+          <a:xfrm>
+            <a:off x="5099791" y="3520440"/>
+            <a:ext cx="1992111" cy="1874519"/>
+          </a:xfrm>
+          <a:prstGeom prst="rect">
+            <a:avLst/>
+          </a:prstGeom>
+        </p:spPr>
+      </p:pic>
+      <p:sp>
+        <p:nvSpPr>
+          <p:cNvPr id="21" name="Rounded Rectangle 20"/>
           <p:cNvSpPr/>
           <p:nvPr/>
         </p:nvSpPr>
         <p:spPr>
           <a:xfrm>
-            <a:off x="3441709" y="2953512"/>
-            <a:ext cx="621792" cy="621792"/>
-          </a:xfrm>
-          <a:prstGeom prst="ellipse">
-            <a:avLst/>
+            <a:off x="7347935" y="1508760"/>
+            <a:ext cx="2211567" cy="4114800"/>
+          </a:xfrm>
+          <a:prstGeom prst="roundRect">
+            <a:avLst>
+              <a:gd name="adj" fmla="val 8000"/>
+            </a:avLst>
           </a:prstGeom>
           <a:solidFill>
-            <a:srgbClr val="3B82F6"/>
+            <a:srgbClr val="0E1C32"/>
           </a:solidFill>
-          <a:ln>
-            <a:noFill/>
+          <a:ln w="12700">
+            <a:solidFill>
+              <a:srgbClr val="1E375A"/>
+            </a:solidFill>
           </a:ln>
         </p:spPr>
         <p:style>
@@ -3637,14 +3868,14 @@
       </p:sp>
       <p:sp>
         <p:nvSpPr>
-          <p:cNvPr id="16" name="TextBox 15"/>
+          <p:cNvPr id="22" name="TextBox 21"/>
           <p:cNvSpPr txBox="1"/>
           <p:nvPr/>
         </p:nvSpPr>
         <p:spPr>
           <a:xfrm>
-            <a:off x="3441709" y="3044952"/>
-            <a:ext cx="621792" cy="438912"/>
+            <a:off x="7421087" y="1618488"/>
+            <a:ext cx="2065263" cy="365760"/>
           </a:xfrm>
           <a:prstGeom prst="rect">
             <a:avLst/>
@@ -3652,13 +3883,16 @@
           <a:noFill/>
         </p:spPr>
         <p:txBody>
-          <a:bodyPr wrap="square" anchor="ctr">
+          <a:bodyPr wrap="square" anchor="t">
             <a:spAutoFit/>
           </a:bodyPr>
           <a:lstStyle/>
           <a:p>
             <a:pPr algn="ctr">
-              <a:defRPr sz="2200" b="1">
+              <a:spcAft>
+                <a:spcPts val="200"/>
+              </a:spcAft>
+              <a:defRPr sz="1800" b="1">
                 <a:solidFill>
                   <a:srgbClr val="FFFFFF"/>
                 </a:solidFill>
@@ -3666,53 +3900,134 @@
               </a:defRPr>
             </a:pPr>
             <a:r>
-              <a:t>云</a:t>
+              <a:t>智能体层</a:t>
+            </a:r>
+          </a:p>
+        </p:txBody>
+      </p:sp>
+      <p:sp>
+        <p:nvSpPr>
+          <p:cNvPr id="23" name="TextBox 22"/>
+          <p:cNvSpPr txBox="1"/>
+          <p:nvPr/>
+        </p:nvSpPr>
+        <p:spPr>
+          <a:xfrm>
+            <a:off x="7421087" y="1984248"/>
+            <a:ext cx="2065263" cy="640080"/>
+          </a:xfrm>
+          <a:prstGeom prst="rect">
+            <a:avLst/>
+          </a:prstGeom>
+          <a:noFill/>
+        </p:spPr>
+        <p:txBody>
+          <a:bodyPr wrap="square" anchor="t">
+            <a:spAutoFit/>
+          </a:bodyPr>
+          <a:lstStyle/>
+          <a:p>
+            <a:pPr algn="ctr">
+              <a:spcAft>
+                <a:spcPts val="200"/>
+              </a:spcAft>
+              <a:defRPr sz="1100" b="0">
+                <a:solidFill>
+                  <a:srgbClr val="B4BED2"/>
+                </a:solidFill>
+                <a:latin typeface="Microsoft YaHei"/>
+              </a:defRPr>
+            </a:pPr>
+            <a:r>
+              <a:t>工具编排，自主规划</a:t>
+            </a:r>
+          </a:p>
+          <a:p>
+            <a:pPr algn="ctr">
+              <a:spcAft>
+                <a:spcPts val="200"/>
+              </a:spcAft>
+              <a:defRPr sz="1100" b="0">
+                <a:solidFill>
+                  <a:srgbClr val="B4BED2"/>
+                </a:solidFill>
+                <a:latin typeface="Microsoft YaHei"/>
+              </a:defRPr>
+            </a:pPr>
+            <a:r>
+              <a:t>与闭环执行。</a:t>
             </a:r>
           </a:p>
         </p:txBody>
       </p:sp>
       <p:pic>
         <p:nvPicPr>
-          <p:cNvPr id="17" name="Picture 16" descr="col-2.png"/>
+          <p:cNvPr id="24" name="Picture 23" descr="04-agent.png"/>
           <p:cNvPicPr>
             <a:picLocks noChangeAspect="1"/>
           </p:cNvPicPr>
           <p:nvPr/>
         </p:nvPicPr>
         <p:blipFill>
-          <a:blip r:embed="rId3"/>
+          <a:blip r:embed="rId8"/>
           <a:stretch>
             <a:fillRect/>
           </a:stretch>
         </p:blipFill>
         <p:spPr>
           <a:xfrm>
-            <a:off x="2773009" y="3776472"/>
-            <a:ext cx="1959193" cy="1572768"/>
+            <a:off x="8124535" y="2697480"/>
+            <a:ext cx="658368" cy="658368"/>
           </a:xfrm>
           <a:prstGeom prst="rect">
             <a:avLst/>
           </a:prstGeom>
         </p:spPr>
       </p:pic>
-      <p:sp>
-        <p:nvSpPr>
-          <p:cNvPr id="18" name="Rounded Rectangle 17"/>
+      <p:pic>
+        <p:nvPicPr>
+          <p:cNvPr id="25" name="Picture 24" descr="04-agent.png"/>
+          <p:cNvPicPr>
+            <a:picLocks noChangeAspect="1"/>
+          </p:cNvPicPr>
+          <p:nvPr/>
+        </p:nvPicPr>
+        <p:blipFill>
+          <a:blip r:embed="rId9"/>
+          <a:stretch>
+            <a:fillRect/>
+          </a:stretch>
+        </p:blipFill>
+        <p:spPr>
+          <a:xfrm>
+            <a:off x="7457663" y="3520440"/>
+            <a:ext cx="1992111" cy="1874519"/>
+          </a:xfrm>
+          <a:prstGeom prst="rect">
+            <a:avLst/>
+          </a:prstGeom>
+        </p:spPr>
+      </p:pic>
+      <p:sp>
+        <p:nvSpPr>
+          <p:cNvPr id="26" name="Rounded Rectangle 25"/>
           <p:cNvSpPr/>
           <p:nvPr/>
         </p:nvSpPr>
         <p:spPr>
           <a:xfrm>
-            <a:off x="5006522" y="1600200"/>
-            <a:ext cx="2178649" cy="3977639"/>
+            <a:off x="9705807" y="1508760"/>
+            <a:ext cx="2211567" cy="4114800"/>
           </a:xfrm>
           <a:prstGeom prst="roundRect">
-            <a:avLst/>
+            <a:avLst>
+              <a:gd name="adj" fmla="val 8000"/>
+            </a:avLst>
           </a:prstGeom>
           <a:solidFill>
             <a:srgbClr val="0E1C32"/>
           </a:solidFill>
-          <a:ln>
+          <a:ln w="12700">
             <a:solidFill>
               <a:srgbClr val="1E375A"/>
             </a:solidFill>
@@ -3742,14 +4057,14 @@
       </p:sp>
       <p:sp>
         <p:nvSpPr>
-          <p:cNvPr id="19" name="TextBox 18"/>
+          <p:cNvPr id="27" name="TextBox 26"/>
           <p:cNvSpPr txBox="1"/>
           <p:nvPr/>
         </p:nvSpPr>
         <p:spPr>
           <a:xfrm>
-            <a:off x="5097962" y="1709928"/>
-            <a:ext cx="1995769" cy="384048"/>
+            <a:off x="9778959" y="1618488"/>
+            <a:ext cx="2065263" cy="365760"/>
           </a:xfrm>
           <a:prstGeom prst="rect">
             <a:avLst/>
@@ -3763,7 +4078,10 @@
           <a:lstStyle/>
           <a:p>
             <a:pPr algn="ctr">
-              <a:defRPr sz="2000" b="1">
+              <a:spcAft>
+                <a:spcPts val="200"/>
+              </a:spcAft>
+              <a:defRPr sz="1800" b="1">
                 <a:solidFill>
                   <a:srgbClr val="FFFFFF"/>
                 </a:solidFill>
@@ -3771,21 +4089,21 @@
               </a:defRPr>
             </a:pPr>
             <a:r>
-              <a:t>模型层</a:t>
-            </a:r>
-          </a:p>
-        </p:txBody>
-      </p:sp>
-      <p:sp>
-        <p:nvSpPr>
-          <p:cNvPr id="20" name="TextBox 19"/>
+              <a:t>应用层</a:t>
+            </a:r>
+          </a:p>
+        </p:txBody>
+      </p:sp>
+      <p:sp>
+        <p:nvSpPr>
+          <p:cNvPr id="28" name="TextBox 27"/>
           <p:cNvSpPr txBox="1"/>
           <p:nvPr/>
         </p:nvSpPr>
         <p:spPr>
           <a:xfrm>
-            <a:off x="5079674" y="2130552"/>
-            <a:ext cx="2032345" cy="658368"/>
+            <a:off x="9778959" y="1984248"/>
+            <a:ext cx="2065263" cy="640080"/>
           </a:xfrm>
           <a:prstGeom prst="rect">
             <a:avLst/>
@@ -3799,7 +4117,10 @@
           <a:lstStyle/>
           <a:p>
             <a:pPr algn="ctr">
-              <a:defRPr sz="1200" b="0">
+              <a:spcAft>
+                <a:spcPts val="200"/>
+              </a:spcAft>
+              <a:defRPr sz="1100" b="0">
                 <a:solidFill>
                   <a:srgbClr val="B4BED2"/>
                 </a:solidFill>
@@ -3807,31 +4128,91 @@
               </a:defRPr>
             </a:pPr>
             <a:r>
-              <a:t>数据训练，算力炼成</a:t>
-            </a:r>
-            <a:br/>
-            <a:r>
-              <a:t>认知能力。</a:t>
-            </a:r>
-          </a:p>
-        </p:txBody>
-      </p:sp>
-      <p:sp>
-        <p:nvSpPr>
-          <p:cNvPr id="21" name="Oval 20"/>
+              <a:t>落地千行百业，</a:t>
+            </a:r>
+          </a:p>
+          <a:p>
+            <a:pPr algn="ctr">
+              <a:spcAft>
+                <a:spcPts val="200"/>
+              </a:spcAft>
+              <a:defRPr sz="1100" b="0">
+                <a:solidFill>
+                  <a:srgbClr val="B4BED2"/>
+                </a:solidFill>
+                <a:latin typeface="Microsoft YaHei"/>
+              </a:defRPr>
+            </a:pPr>
+            <a:r>
+              <a:t>嵌入日常工作。</a:t>
+            </a:r>
+          </a:p>
+        </p:txBody>
+      </p:sp>
+      <p:pic>
+        <p:nvPicPr>
+          <p:cNvPr id="29" name="Picture 28" descr="05-app.png"/>
+          <p:cNvPicPr>
+            <a:picLocks noChangeAspect="1"/>
+          </p:cNvPicPr>
+          <p:nvPr/>
+        </p:nvPicPr>
+        <p:blipFill>
+          <a:blip r:embed="rId10"/>
+          <a:stretch>
+            <a:fillRect/>
+          </a:stretch>
+        </p:blipFill>
+        <p:spPr>
+          <a:xfrm>
+            <a:off x="10482407" y="2697480"/>
+            <a:ext cx="658368" cy="658368"/>
+          </a:xfrm>
+          <a:prstGeom prst="rect">
+            <a:avLst/>
+          </a:prstGeom>
+        </p:spPr>
+      </p:pic>
+      <p:pic>
+        <p:nvPicPr>
+          <p:cNvPr id="30" name="Picture 29" descr="05-app.png"/>
+          <p:cNvPicPr>
+            <a:picLocks noChangeAspect="1"/>
+          </p:cNvPicPr>
+          <p:nvPr/>
+        </p:nvPicPr>
+        <p:blipFill>
+          <a:blip r:embed="rId11"/>
+          <a:stretch>
+            <a:fillRect/>
+          </a:stretch>
+        </p:blipFill>
+        <p:spPr>
+          <a:xfrm>
+            <a:off x="9815535" y="3520440"/>
+            <a:ext cx="1992111" cy="1874519"/>
+          </a:xfrm>
+          <a:prstGeom prst="rect">
+            <a:avLst/>
+          </a:prstGeom>
+        </p:spPr>
+      </p:pic>
+      <p:sp>
+        <p:nvSpPr>
+          <p:cNvPr id="31" name="Rectangle 30"/>
           <p:cNvSpPr/>
           <p:nvPr/>
         </p:nvSpPr>
         <p:spPr>
           <a:xfrm>
-            <a:off x="5784950" y="2953512"/>
-            <a:ext cx="621792" cy="621792"/>
-          </a:xfrm>
-          <a:prstGeom prst="ellipse">
+            <a:off x="0" y="5806440"/>
+            <a:ext cx="12191695" cy="960120"/>
+          </a:xfrm>
+          <a:prstGeom prst="rect">
             <a:avLst/>
           </a:prstGeom>
           <a:solidFill>
-            <a:srgbClr val="3B82F6"/>
+            <a:srgbClr val="12233C"/>
           </a:solidFill>
           <a:ln>
             <a:noFill/>
@@ -3861,14 +4242,14 @@
       </p:sp>
       <p:sp>
         <p:nvSpPr>
-          <p:cNvPr id="22" name="TextBox 21"/>
+          <p:cNvPr id="32" name="TextBox 31"/>
           <p:cNvSpPr txBox="1"/>
           <p:nvPr/>
         </p:nvSpPr>
         <p:spPr>
           <a:xfrm>
-            <a:off x="5784950" y="3044952"/>
-            <a:ext cx="621792" cy="438912"/>
+            <a:off x="365760" y="6062472"/>
+            <a:ext cx="6217920" cy="502920"/>
           </a:xfrm>
           <a:prstGeom prst="rect">
             <a:avLst/>
@@ -3876,43 +4257,50 @@
           <a:noFill/>
         </p:spPr>
         <p:txBody>
-          <a:bodyPr wrap="square" anchor="ctr">
+          <a:bodyPr wrap="none" anchor="ctr">
             <a:spAutoFit/>
           </a:bodyPr>
           <a:lstStyle/>
           <a:p>
-            <a:pPr algn="ctr">
-              <a:defRPr sz="2200" b="1">
+            <a:r>
+              <a:rPr sz="1400">
                 <a:solidFill>
                   <a:srgbClr val="FFFFFF"/>
                 </a:solidFill>
                 <a:latin typeface="Microsoft YaHei"/>
-              </a:defRPr>
-            </a:pPr>
-            <a:r>
-              <a:t>脑</a:t>
+              </a:rPr>
+              <a:t>同一技术，不同层级。</a:t>
+            </a:r>
+            <a:r>
+              <a:rPr sz="1400" b="1">
+                <a:solidFill>
+                  <a:srgbClr val="F5C518"/>
+                </a:solidFill>
+                <a:latin typeface="Microsoft YaHei"/>
+              </a:rPr>
+              <a:t>看懂产业链，才能抓住价值。</a:t>
             </a:r>
           </a:p>
         </p:txBody>
       </p:sp>
       <p:pic>
         <p:nvPicPr>
-          <p:cNvPr id="23" name="Picture 22" descr="col-3.png"/>
+          <p:cNvPr id="33" name="Picture 32" descr="01-capex.png"/>
           <p:cNvPicPr>
             <a:picLocks noChangeAspect="1"/>
           </p:cNvPicPr>
           <p:nvPr/>
         </p:nvPicPr>
         <p:blipFill>
-          <a:blip r:embed="rId4"/>
+          <a:blip r:embed="rId12"/>
           <a:stretch>
             <a:fillRect/>
           </a:stretch>
         </p:blipFill>
         <p:spPr>
           <a:xfrm>
-            <a:off x="5116250" y="3776472"/>
-            <a:ext cx="1959193" cy="1572768"/>
+            <a:off x="7315200" y="5916168"/>
+            <a:ext cx="365760" cy="365760"/>
           </a:xfrm>
           <a:prstGeom prst="rect">
             <a:avLst/>
@@ -3921,59 +4309,14 @@
       </p:pic>
       <p:sp>
         <p:nvSpPr>
-          <p:cNvPr id="24" name="Rounded Rectangle 23"/>
-          <p:cNvSpPr/>
-          <p:nvPr/>
-        </p:nvSpPr>
-        <p:spPr>
-          <a:xfrm>
-            <a:off x="7349763" y="1600200"/>
-            <a:ext cx="2178649" cy="3977639"/>
-          </a:xfrm>
-          <a:prstGeom prst="roundRect">
-            <a:avLst/>
-          </a:prstGeom>
-          <a:solidFill>
-            <a:srgbClr val="0E1C32"/>
-          </a:solidFill>
-          <a:ln>
-            <a:solidFill>
-              <a:srgbClr val="1E375A"/>
-            </a:solidFill>
-          </a:ln>
-        </p:spPr>
-        <p:style>
-          <a:lnRef idx="1">
-            <a:schemeClr val="accent1"/>
-          </a:lnRef>
-          <a:fillRef idx="3">
-            <a:schemeClr val="accent1"/>
-          </a:fillRef>
-          <a:effectRef idx="2">
-            <a:schemeClr val="accent1"/>
-          </a:effectRef>
-          <a:fontRef idx="minor">
-            <a:schemeClr val="lt1"/>
-          </a:fontRef>
-        </p:style>
-        <p:txBody>
-          <a:bodyPr rtlCol="0" anchor="ctr"/>
-          <a:lstStyle/>
-          <a:p>
-            <a:pPr algn="ctr"/>
-          </a:p>
-        </p:txBody>
-      </p:sp>
-      <p:sp>
-        <p:nvSpPr>
-          <p:cNvPr id="25" name="TextBox 24"/>
+          <p:cNvPr id="34" name="TextBox 33"/>
           <p:cNvSpPr txBox="1"/>
           <p:nvPr/>
         </p:nvSpPr>
         <p:spPr>
           <a:xfrm>
-            <a:off x="7441203" y="1709928"/>
-            <a:ext cx="1995769" cy="384048"/>
+            <a:off x="6949440" y="6327648"/>
+            <a:ext cx="1188720" cy="320040"/>
           </a:xfrm>
           <a:prstGeom prst="rect">
             <a:avLst/>
@@ -3987,43 +4330,10 @@
           <a:lstStyle/>
           <a:p>
             <a:pPr algn="ctr">
-              <a:defRPr sz="2000" b="1">
-                <a:solidFill>
-                  <a:srgbClr val="FFFFFF"/>
-                </a:solidFill>
-                <a:latin typeface="Microsoft YaHei"/>
-              </a:defRPr>
-            </a:pPr>
-            <a:r>
-              <a:t>智能体层</a:t>
-            </a:r>
-          </a:p>
-        </p:txBody>
-      </p:sp>
-      <p:sp>
-        <p:nvSpPr>
-          <p:cNvPr id="26" name="TextBox 25"/>
-          <p:cNvSpPr txBox="1"/>
-          <p:nvPr/>
-        </p:nvSpPr>
-        <p:spPr>
-          <a:xfrm>
-            <a:off x="7422915" y="2130552"/>
-            <a:ext cx="2032345" cy="658368"/>
-          </a:xfrm>
-          <a:prstGeom prst="rect">
-            <a:avLst/>
-          </a:prstGeom>
-          <a:noFill/>
-        </p:spPr>
-        <p:txBody>
-          <a:bodyPr wrap="square" anchor="t">
-            <a:spAutoFit/>
-          </a:bodyPr>
-          <a:lstStyle/>
-          <a:p>
-            <a:pPr algn="ctr">
-              <a:defRPr sz="1200" b="0">
+              <a:spcAft>
+                <a:spcPts val="200"/>
+              </a:spcAft>
+              <a:defRPr sz="1100" b="0">
                 <a:solidFill>
                   <a:srgbClr val="B4BED2"/>
                 </a:solidFill>
@@ -4031,112 +4341,29 @@
               </a:defRPr>
             </a:pPr>
             <a:r>
-              <a:t>工具编排，自主规划</a:t>
-            </a:r>
-            <a:br/>
-            <a:r>
-              <a:t>与闭环执行。</a:t>
-            </a:r>
-          </a:p>
-        </p:txBody>
-      </p:sp>
-      <p:sp>
-        <p:nvSpPr>
-          <p:cNvPr id="27" name="Oval 26"/>
-          <p:cNvSpPr/>
-          <p:nvPr/>
-        </p:nvSpPr>
-        <p:spPr>
-          <a:xfrm>
-            <a:off x="8128191" y="2953512"/>
-            <a:ext cx="621792" cy="621792"/>
-          </a:xfrm>
-          <a:prstGeom prst="ellipse">
-            <a:avLst/>
-          </a:prstGeom>
-          <a:solidFill>
-            <a:srgbClr val="3B82F6"/>
-          </a:solidFill>
-          <a:ln>
-            <a:noFill/>
-          </a:ln>
-        </p:spPr>
-        <p:style>
-          <a:lnRef idx="1">
-            <a:schemeClr val="accent1"/>
-          </a:lnRef>
-          <a:fillRef idx="3">
-            <a:schemeClr val="accent1"/>
-          </a:fillRef>
-          <a:effectRef idx="2">
-            <a:schemeClr val="accent1"/>
-          </a:effectRef>
-          <a:fontRef idx="minor">
-            <a:schemeClr val="lt1"/>
-          </a:fontRef>
-        </p:style>
-        <p:txBody>
-          <a:bodyPr rtlCol="0" anchor="ctr"/>
-          <a:lstStyle/>
-          <a:p>
-            <a:pPr algn="ctr"/>
-          </a:p>
-        </p:txBody>
-      </p:sp>
-      <p:sp>
-        <p:nvSpPr>
-          <p:cNvPr id="28" name="TextBox 27"/>
-          <p:cNvSpPr txBox="1"/>
-          <p:nvPr/>
-        </p:nvSpPr>
-        <p:spPr>
-          <a:xfrm>
-            <a:off x="8128191" y="3044952"/>
-            <a:ext cx="621792" cy="438912"/>
-          </a:xfrm>
-          <a:prstGeom prst="rect">
-            <a:avLst/>
-          </a:prstGeom>
-          <a:noFill/>
-        </p:spPr>
-        <p:txBody>
-          <a:bodyPr wrap="square" anchor="ctr">
-            <a:spAutoFit/>
-          </a:bodyPr>
-          <a:lstStyle/>
-          <a:p>
-            <a:pPr algn="ctr">
-              <a:defRPr sz="2200" b="1">
-                <a:solidFill>
-                  <a:srgbClr val="FFFFFF"/>
-                </a:solidFill>
-                <a:latin typeface="Microsoft YaHei"/>
-              </a:defRPr>
-            </a:pPr>
-            <a:r>
-              <a:t>链</a:t>
+              <a:t>资本开支</a:t>
             </a:r>
           </a:p>
         </p:txBody>
       </p:sp>
       <p:pic>
         <p:nvPicPr>
-          <p:cNvPr id="29" name="Picture 28" descr="col-4.png"/>
+          <p:cNvPr id="35" name="Picture 34" descr="02-latency.png"/>
           <p:cNvPicPr>
             <a:picLocks noChangeAspect="1"/>
           </p:cNvPicPr>
           <p:nvPr/>
         </p:nvPicPr>
         <p:blipFill>
-          <a:blip r:embed="rId5"/>
+          <a:blip r:embed="rId13"/>
           <a:stretch>
             <a:fillRect/>
           </a:stretch>
         </p:blipFill>
         <p:spPr>
           <a:xfrm>
-            <a:off x="7459491" y="3776472"/>
-            <a:ext cx="1959193" cy="1572768"/>
+            <a:off x="8641080" y="5916168"/>
+            <a:ext cx="365760" cy="365760"/>
           </a:xfrm>
           <a:prstGeom prst="rect">
             <a:avLst/>
@@ -4145,59 +4372,14 @@
       </p:pic>
       <p:sp>
         <p:nvSpPr>
-          <p:cNvPr id="30" name="Rounded Rectangle 29"/>
-          <p:cNvSpPr/>
-          <p:nvPr/>
-        </p:nvSpPr>
-        <p:spPr>
-          <a:xfrm>
-            <a:off x="9693004" y="1600200"/>
-            <a:ext cx="2178649" cy="3977639"/>
-          </a:xfrm>
-          <a:prstGeom prst="roundRect">
-            <a:avLst/>
-          </a:prstGeom>
-          <a:solidFill>
-            <a:srgbClr val="0E1C32"/>
-          </a:solidFill>
-          <a:ln>
-            <a:solidFill>
-              <a:srgbClr val="1E375A"/>
-            </a:solidFill>
-          </a:ln>
-        </p:spPr>
-        <p:style>
-          <a:lnRef idx="1">
-            <a:schemeClr val="accent1"/>
-          </a:lnRef>
-          <a:fillRef idx="3">
-            <a:schemeClr val="accent1"/>
-          </a:fillRef>
-          <a:effectRef idx="2">
-            <a:schemeClr val="accent1"/>
-          </a:effectRef>
-          <a:fontRef idx="minor">
-            <a:schemeClr val="lt1"/>
-          </a:fontRef>
-        </p:style>
-        <p:txBody>
-          <a:bodyPr rtlCol="0" anchor="ctr"/>
-          <a:lstStyle/>
-          <a:p>
-            <a:pPr algn="ctr"/>
-          </a:p>
-        </p:txBody>
-      </p:sp>
-      <p:sp>
-        <p:nvSpPr>
-          <p:cNvPr id="31" name="TextBox 30"/>
+          <p:cNvPr id="36" name="TextBox 35"/>
           <p:cNvSpPr txBox="1"/>
           <p:nvPr/>
         </p:nvSpPr>
         <p:spPr>
           <a:xfrm>
-            <a:off x="9784444" y="1709928"/>
-            <a:ext cx="1995769" cy="384048"/>
+            <a:off x="8275320" y="6327648"/>
+            <a:ext cx="1188720" cy="320040"/>
           </a:xfrm>
           <a:prstGeom prst="rect">
             <a:avLst/>
@@ -4211,43 +4393,10 @@
           <a:lstStyle/>
           <a:p>
             <a:pPr algn="ctr">
-              <a:defRPr sz="2000" b="1">
-                <a:solidFill>
-                  <a:srgbClr val="FFFFFF"/>
-                </a:solidFill>
-                <a:latin typeface="Microsoft YaHei"/>
-              </a:defRPr>
-            </a:pPr>
-            <a:r>
-              <a:t>应用层</a:t>
-            </a:r>
-          </a:p>
-        </p:txBody>
-      </p:sp>
-      <p:sp>
-        <p:nvSpPr>
-          <p:cNvPr id="32" name="TextBox 31"/>
-          <p:cNvSpPr txBox="1"/>
-          <p:nvPr/>
-        </p:nvSpPr>
-        <p:spPr>
-          <a:xfrm>
-            <a:off x="9766156" y="2130552"/>
-            <a:ext cx="2032345" cy="658368"/>
-          </a:xfrm>
-          <a:prstGeom prst="rect">
-            <a:avLst/>
-          </a:prstGeom>
-          <a:noFill/>
-        </p:spPr>
-        <p:txBody>
-          <a:bodyPr wrap="square" anchor="t">
-            <a:spAutoFit/>
-          </a:bodyPr>
-          <a:lstStyle/>
-          <a:p>
-            <a:pPr algn="ctr">
-              <a:defRPr sz="1200" b="0">
+              <a:spcAft>
+                <a:spcPts val="200"/>
+              </a:spcAft>
+              <a:defRPr sz="1100" b="0">
                 <a:solidFill>
                   <a:srgbClr val="B4BED2"/>
                 </a:solidFill>
@@ -4255,112 +4404,29 @@
               </a:defRPr>
             </a:pPr>
             <a:r>
-              <a:t>落地千行百业，</a:t>
-            </a:r>
-            <a:br/>
-            <a:r>
-              <a:t>嵌入日常工作。</a:t>
-            </a:r>
-          </a:p>
-        </p:txBody>
-      </p:sp>
-      <p:sp>
-        <p:nvSpPr>
-          <p:cNvPr id="33" name="Oval 32"/>
-          <p:cNvSpPr/>
-          <p:nvPr/>
-        </p:nvSpPr>
-        <p:spPr>
-          <a:xfrm>
-            <a:off x="10471432" y="2953512"/>
-            <a:ext cx="621792" cy="621792"/>
-          </a:xfrm>
-          <a:prstGeom prst="ellipse">
-            <a:avLst/>
-          </a:prstGeom>
-          <a:solidFill>
-            <a:srgbClr val="3B82F6"/>
-          </a:solidFill>
-          <a:ln>
-            <a:noFill/>
-          </a:ln>
-        </p:spPr>
-        <p:style>
-          <a:lnRef idx="1">
-            <a:schemeClr val="accent1"/>
-          </a:lnRef>
-          <a:fillRef idx="3">
-            <a:schemeClr val="accent1"/>
-          </a:fillRef>
-          <a:effectRef idx="2">
-            <a:schemeClr val="accent1"/>
-          </a:effectRef>
-          <a:fontRef idx="minor">
-            <a:schemeClr val="lt1"/>
-          </a:fontRef>
-        </p:style>
-        <p:txBody>
-          <a:bodyPr rtlCol="0" anchor="ctr"/>
-          <a:lstStyle/>
-          <a:p>
-            <a:pPr algn="ctr"/>
-          </a:p>
-        </p:txBody>
-      </p:sp>
-      <p:sp>
-        <p:nvSpPr>
-          <p:cNvPr id="34" name="TextBox 33"/>
-          <p:cNvSpPr txBox="1"/>
-          <p:nvPr/>
-        </p:nvSpPr>
-        <p:spPr>
-          <a:xfrm>
-            <a:off x="10471432" y="3044952"/>
-            <a:ext cx="621792" cy="438912"/>
-          </a:xfrm>
-          <a:prstGeom prst="rect">
-            <a:avLst/>
-          </a:prstGeom>
-          <a:noFill/>
-        </p:spPr>
-        <p:txBody>
-          <a:bodyPr wrap="square" anchor="ctr">
-            <a:spAutoFit/>
-          </a:bodyPr>
-          <a:lstStyle/>
-          <a:p>
-            <a:pPr algn="ctr">
-              <a:defRPr sz="2200" b="1">
-                <a:solidFill>
-                  <a:srgbClr val="FFFFFF"/>
-                </a:solidFill>
-                <a:latin typeface="Microsoft YaHei"/>
-              </a:defRPr>
-            </a:pPr>
-            <a:r>
-              <a:t>用</a:t>
+              <a:t>推理延迟</a:t>
             </a:r>
           </a:p>
         </p:txBody>
       </p:sp>
       <p:pic>
         <p:nvPicPr>
-          <p:cNvPr id="35" name="Picture 34" descr="col-5.png"/>
+          <p:cNvPr id="37" name="Picture 36" descr="03-unit.png"/>
           <p:cNvPicPr>
             <a:picLocks noChangeAspect="1"/>
           </p:cNvPicPr>
           <p:nvPr/>
         </p:nvPicPr>
         <p:blipFill>
-          <a:blip r:embed="rId6"/>
+          <a:blip r:embed="rId14"/>
           <a:stretch>
             <a:fillRect/>
           </a:stretch>
         </p:blipFill>
         <p:spPr>
           <a:xfrm>
-            <a:off x="9802732" y="3776472"/>
-            <a:ext cx="1959193" cy="1572768"/>
+            <a:off x="9966960" y="5916168"/>
+            <a:ext cx="365760" cy="365760"/>
           </a:xfrm>
           <a:prstGeom prst="rect">
             <a:avLst/>
@@ -4369,57 +4435,14 @@
       </p:pic>
       <p:sp>
         <p:nvSpPr>
-          <p:cNvPr id="36" name="Rectangle 35"/>
-          <p:cNvSpPr/>
-          <p:nvPr/>
-        </p:nvSpPr>
-        <p:spPr>
-          <a:xfrm>
-            <a:off x="0" y="5806440"/>
-            <a:ext cx="12191695" cy="960120"/>
-          </a:xfrm>
-          <a:prstGeom prst="rect">
-            <a:avLst/>
-          </a:prstGeom>
-          <a:solidFill>
-            <a:srgbClr val="12233C"/>
-          </a:solidFill>
-          <a:ln>
-            <a:noFill/>
-          </a:ln>
-        </p:spPr>
-        <p:style>
-          <a:lnRef idx="1">
-            <a:schemeClr val="accent1"/>
-          </a:lnRef>
-          <a:fillRef idx="3">
-            <a:schemeClr val="accent1"/>
-          </a:fillRef>
-          <a:effectRef idx="2">
-            <a:schemeClr val="accent1"/>
-          </a:effectRef>
-          <a:fontRef idx="minor">
-            <a:schemeClr val="lt1"/>
-          </a:fontRef>
-        </p:style>
-        <p:txBody>
-          <a:bodyPr rtlCol="0" anchor="ctr"/>
-          <a:lstStyle/>
-          <a:p>
-            <a:pPr algn="ctr"/>
-          </a:p>
-        </p:txBody>
-      </p:sp>
-      <p:sp>
-        <p:nvSpPr>
-          <p:cNvPr id="37" name="TextBox 36"/>
+          <p:cNvPr id="38" name="TextBox 37"/>
           <p:cNvSpPr txBox="1"/>
           <p:nvPr/>
         </p:nvSpPr>
         <p:spPr>
           <a:xfrm>
-            <a:off x="411480" y="6062472"/>
-            <a:ext cx="6400800" cy="502920"/>
+            <a:off x="9601200" y="6327648"/>
+            <a:ext cx="1188720" cy="320040"/>
           </a:xfrm>
           <a:prstGeom prst="rect">
             <a:avLst/>
@@ -4427,441 +4450,16 @@
           <a:noFill/>
         </p:spPr>
         <p:txBody>
-          <a:bodyPr wrap="none" anchor="ctr">
-            <a:spAutoFit/>
-          </a:bodyPr>
-          <a:lstStyle/>
-          <a:p>
-            <a:r>
-              <a:rPr sz="1500">
-                <a:solidFill>
-                  <a:srgbClr val="FFFFFF"/>
-                </a:solidFill>
-                <a:latin typeface="Microsoft YaHei"/>
-              </a:rPr>
-              <a:t>同一技术，不同层级。</a:t>
-            </a:r>
-            <a:r>
-              <a:rPr sz="1500" b="1">
-                <a:solidFill>
-                  <a:srgbClr val="F5C518"/>
-                </a:solidFill>
-                <a:latin typeface="Microsoft YaHei"/>
-              </a:rPr>
-              <a:t>看懂产业链，才能抓住价值。</a:t>
-            </a:r>
-          </a:p>
-        </p:txBody>
-      </p:sp>
-      <p:sp>
-        <p:nvSpPr>
-          <p:cNvPr id="38" name="Oval 37"/>
-          <p:cNvSpPr/>
-          <p:nvPr/>
-        </p:nvSpPr>
-        <p:spPr>
-          <a:xfrm>
-            <a:off x="7406640" y="5971032"/>
-            <a:ext cx="384048" cy="384048"/>
-          </a:xfrm>
-          <a:prstGeom prst="ellipse">
-            <a:avLst/>
-          </a:prstGeom>
-          <a:solidFill>
-            <a:srgbClr val="1E375A"/>
-          </a:solidFill>
-          <a:ln>
-            <a:solidFill>
-              <a:srgbClr val="3B82F6"/>
-            </a:solidFill>
-          </a:ln>
-        </p:spPr>
-        <p:style>
-          <a:lnRef idx="1">
-            <a:schemeClr val="accent1"/>
-          </a:lnRef>
-          <a:fillRef idx="3">
-            <a:schemeClr val="accent1"/>
-          </a:fillRef>
-          <a:effectRef idx="2">
-            <a:schemeClr val="accent1"/>
-          </a:effectRef>
-          <a:fontRef idx="minor">
-            <a:schemeClr val="lt1"/>
-          </a:fontRef>
-        </p:style>
-        <p:txBody>
-          <a:bodyPr rtlCol="0" anchor="ctr"/>
-          <a:lstStyle/>
-          <a:p>
-            <a:pPr algn="ctr"/>
-          </a:p>
-        </p:txBody>
-      </p:sp>
-      <p:sp>
-        <p:nvSpPr>
-          <p:cNvPr id="39" name="TextBox 38"/>
-          <p:cNvSpPr txBox="1"/>
-          <p:nvPr/>
-        </p:nvSpPr>
-        <p:spPr>
-          <a:xfrm>
-            <a:off x="7360920" y="6391656"/>
-            <a:ext cx="1234440" cy="320040"/>
-          </a:xfrm>
-          <a:prstGeom prst="rect">
-            <a:avLst/>
-          </a:prstGeom>
-          <a:noFill/>
-        </p:spPr>
-        <p:txBody>
           <a:bodyPr wrap="square" anchor="t">
             <a:spAutoFit/>
           </a:bodyPr>
           <a:lstStyle/>
           <a:p>
             <a:pPr algn="ctr">
+              <a:spcAft>
+                <a:spcPts val="200"/>
+              </a:spcAft>
               <a:defRPr sz="1100" b="0">
-                <a:solidFill>
-                  <a:srgbClr val="FFFFFF"/>
-                </a:solidFill>
-                <a:latin typeface="Microsoft YaHei"/>
-              </a:defRPr>
-            </a:pPr>
-            <a:r>
-              <a:t>资本开支</a:t>
-            </a:r>
-          </a:p>
-        </p:txBody>
-      </p:sp>
-      <p:sp>
-        <p:nvSpPr>
-          <p:cNvPr id="40" name="Oval 39"/>
-          <p:cNvSpPr/>
-          <p:nvPr/>
-        </p:nvSpPr>
-        <p:spPr>
-          <a:xfrm>
-            <a:off x="8869680" y="5971032"/>
-            <a:ext cx="384048" cy="384048"/>
-          </a:xfrm>
-          <a:prstGeom prst="ellipse">
-            <a:avLst/>
-          </a:prstGeom>
-          <a:solidFill>
-            <a:srgbClr val="1E375A"/>
-          </a:solidFill>
-          <a:ln>
-            <a:solidFill>
-              <a:srgbClr val="3B82F6"/>
-            </a:solidFill>
-          </a:ln>
-        </p:spPr>
-        <p:style>
-          <a:lnRef idx="1">
-            <a:schemeClr val="accent1"/>
-          </a:lnRef>
-          <a:fillRef idx="3">
-            <a:schemeClr val="accent1"/>
-          </a:fillRef>
-          <a:effectRef idx="2">
-            <a:schemeClr val="accent1"/>
-          </a:effectRef>
-          <a:fontRef idx="minor">
-            <a:schemeClr val="lt1"/>
-          </a:fontRef>
-        </p:style>
-        <p:txBody>
-          <a:bodyPr rtlCol="0" anchor="ctr"/>
-          <a:lstStyle/>
-          <a:p>
-            <a:pPr algn="ctr"/>
-          </a:p>
-        </p:txBody>
-      </p:sp>
-      <p:sp>
-        <p:nvSpPr>
-          <p:cNvPr id="41" name="TextBox 40"/>
-          <p:cNvSpPr txBox="1"/>
-          <p:nvPr/>
-        </p:nvSpPr>
-        <p:spPr>
-          <a:xfrm>
-            <a:off x="8823960" y="6391656"/>
-            <a:ext cx="1234440" cy="320040"/>
-          </a:xfrm>
-          <a:prstGeom prst="rect">
-            <a:avLst/>
-          </a:prstGeom>
-          <a:noFill/>
-        </p:spPr>
-        <p:txBody>
-          <a:bodyPr wrap="square" anchor="t">
-            <a:spAutoFit/>
-          </a:bodyPr>
-          <a:lstStyle/>
-          <a:p>
-            <a:pPr algn="ctr">
-              <a:defRPr sz="1100" b="0">
-                <a:solidFill>
-                  <a:srgbClr val="FFFFFF"/>
-                </a:solidFill>
-                <a:latin typeface="Microsoft YaHei"/>
-              </a:defRPr>
-            </a:pPr>
-            <a:r>
-              <a:t>推理延迟</a:t>
-            </a:r>
-          </a:p>
-        </p:txBody>
-      </p:sp>
-      <p:sp>
-        <p:nvSpPr>
-          <p:cNvPr id="42" name="Oval 41"/>
-          <p:cNvSpPr/>
-          <p:nvPr/>
-        </p:nvSpPr>
-        <p:spPr>
-          <a:xfrm>
-            <a:off x="10332720" y="5971032"/>
-            <a:ext cx="384048" cy="384048"/>
-          </a:xfrm>
-          <a:prstGeom prst="ellipse">
-            <a:avLst/>
-          </a:prstGeom>
-          <a:solidFill>
-            <a:srgbClr val="1E375A"/>
-          </a:solidFill>
-          <a:ln>
-            <a:solidFill>
-              <a:srgbClr val="3B82F6"/>
-            </a:solidFill>
-          </a:ln>
-        </p:spPr>
-        <p:style>
-          <a:lnRef idx="1">
-            <a:schemeClr val="accent1"/>
-          </a:lnRef>
-          <a:fillRef idx="3">
-            <a:schemeClr val="accent1"/>
-          </a:fillRef>
-          <a:effectRef idx="2">
-            <a:schemeClr val="accent1"/>
-          </a:effectRef>
-          <a:fontRef idx="minor">
-            <a:schemeClr val="lt1"/>
-          </a:fontRef>
-        </p:style>
-        <p:txBody>
-          <a:bodyPr rtlCol="0" anchor="ctr"/>
-          <a:lstStyle/>
-          <a:p>
-            <a:pPr algn="ctr"/>
-          </a:p>
-        </p:txBody>
-      </p:sp>
-      <p:sp>
-        <p:nvSpPr>
-          <p:cNvPr id="43" name="TextBox 42"/>
-          <p:cNvSpPr txBox="1"/>
-          <p:nvPr/>
-        </p:nvSpPr>
-        <p:spPr>
-          <a:xfrm>
-            <a:off x="10287000" y="6391656"/>
-            <a:ext cx="1234440" cy="320040"/>
-          </a:xfrm>
-          <a:prstGeom prst="rect">
-            <a:avLst/>
-          </a:prstGeom>
-          <a:noFill/>
-        </p:spPr>
-        <p:txBody>
-          <a:bodyPr wrap="square" anchor="t">
-            <a:spAutoFit/>
-          </a:bodyPr>
-          <a:lstStyle/>
-          <a:p>
-            <a:pPr algn="ctr">
-              <a:defRPr sz="1100" b="0">
-                <a:solidFill>
-                  <a:srgbClr val="FFFFFF"/>
-                </a:solidFill>
-                <a:latin typeface="Microsoft YaHei"/>
-              </a:defRPr>
-            </a:pPr>
-            <a:r>
-              <a:t>单位经济</a:t>
-            </a:r>
-          </a:p>
-        </p:txBody>
-      </p:sp>
-      <p:sp>
-        <p:nvSpPr>
-          <p:cNvPr id="44" name="Oval 43"/>
-          <p:cNvSpPr/>
-          <p:nvPr/>
-        </p:nvSpPr>
-        <p:spPr>
-          <a:xfrm>
-            <a:off x="11795760" y="5971032"/>
-            <a:ext cx="384048" cy="384048"/>
-          </a:xfrm>
-          <a:prstGeom prst="ellipse">
-            <a:avLst/>
-          </a:prstGeom>
-          <a:solidFill>
-            <a:srgbClr val="1E375A"/>
-          </a:solidFill>
-          <a:ln>
-            <a:solidFill>
-              <a:srgbClr val="3B82F6"/>
-            </a:solidFill>
-          </a:ln>
-        </p:spPr>
-        <p:style>
-          <a:lnRef idx="1">
-            <a:schemeClr val="accent1"/>
-          </a:lnRef>
-          <a:fillRef idx="3">
-            <a:schemeClr val="accent1"/>
-          </a:fillRef>
-          <a:effectRef idx="2">
-            <a:schemeClr val="accent1"/>
-          </a:effectRef>
-          <a:fontRef idx="minor">
-            <a:schemeClr val="lt1"/>
-          </a:fontRef>
-        </p:style>
-        <p:txBody>
-          <a:bodyPr rtlCol="0" anchor="ctr"/>
-          <a:lstStyle/>
-          <a:p>
-            <a:pPr algn="ctr"/>
-          </a:p>
-        </p:txBody>
-      </p:sp>
-      <p:sp>
-        <p:nvSpPr>
-          <p:cNvPr id="45" name="TextBox 44"/>
-          <p:cNvSpPr txBox="1"/>
-          <p:nvPr/>
-        </p:nvSpPr>
-        <p:spPr>
-          <a:xfrm>
-            <a:off x="11750040" y="6391656"/>
-            <a:ext cx="1234440" cy="320040"/>
-          </a:xfrm>
-          <a:prstGeom prst="rect">
-            <a:avLst/>
-          </a:prstGeom>
-          <a:noFill/>
-        </p:spPr>
-        <p:txBody>
-          <a:bodyPr wrap="square" anchor="t">
-            <a:spAutoFit/>
-          </a:bodyPr>
-          <a:lstStyle/>
-          <a:p>
-            <a:pPr algn="ctr">
-              <a:defRPr sz="1100" b="0">
-                <a:solidFill>
-                  <a:srgbClr val="FFFFFF"/>
-                </a:solidFill>
-                <a:latin typeface="Microsoft YaHei"/>
-              </a:defRPr>
-            </a:pPr>
-            <a:r>
-              <a:t>产品契合</a:t>
-            </a:r>
-          </a:p>
-        </p:txBody>
-      </p:sp>
-    </p:spTree>
-  </p:cSld>
-  <p:clrMapOvr>
-    <a:masterClrMapping/>
-  </p:clrMapOvr>
-</p:sld>
-</file>
-
-<file path=ppt/slides/slide2.xml><?xml version="1.0" encoding="utf-8"?>
-<p:sld xmlns:a="http://schemas.openxmlformats.org/drawingml/2006/main" xmlns:p="http://schemas.openxmlformats.org/presentationml/2006/main" xmlns:r="http://schemas.openxmlformats.org/officeDocument/2006/relationships">
-  <p:cSld>
-    <p:spTree>
-      <p:nvGrpSpPr>
-        <p:cNvPr id="1" name=""/>
-        <p:cNvGrpSpPr/>
-        <p:nvPr/>
-      </p:nvGrpSpPr>
-      <p:grpSpPr/>
-      <p:sp>
-        <p:nvSpPr>
-          <p:cNvPr id="2" name="Rectangle 1"/>
-          <p:cNvSpPr/>
-          <p:nvPr/>
-        </p:nvSpPr>
-        <p:spPr>
-          <a:xfrm>
-            <a:off x="0" y="0"/>
-            <a:ext cx="12191695" cy="6858000"/>
-          </a:xfrm>
-          <a:prstGeom prst="rect">
-            <a:avLst/>
-          </a:prstGeom>
-          <a:solidFill>
-            <a:srgbClr val="0A1628"/>
-          </a:solidFill>
-          <a:ln>
-            <a:noFill/>
-          </a:ln>
-        </p:spPr>
-        <p:style>
-          <a:lnRef idx="1">
-            <a:schemeClr val="accent1"/>
-          </a:lnRef>
-          <a:fillRef idx="3">
-            <a:schemeClr val="accent1"/>
-          </a:fillRef>
-          <a:effectRef idx="2">
-            <a:schemeClr val="accent1"/>
-          </a:effectRef>
-          <a:fontRef idx="minor">
-            <a:schemeClr val="lt1"/>
-          </a:fontRef>
-        </p:style>
-        <p:txBody>
-          <a:bodyPr rtlCol="0" anchor="ctr"/>
-          <a:lstStyle/>
-          <a:p>
-            <a:pPr algn="ctr"/>
-          </a:p>
-        </p:txBody>
-      </p:sp>
-      <p:sp>
-        <p:nvSpPr>
-          <p:cNvPr id="3" name="TextBox 2"/>
-          <p:cNvSpPr txBox="1"/>
-          <p:nvPr/>
-        </p:nvSpPr>
-        <p:spPr>
-          <a:xfrm>
-            <a:off x="365760" y="137160"/>
-            <a:ext cx="7315200" cy="320040"/>
-          </a:xfrm>
-          <a:prstGeom prst="rect">
-            <a:avLst/>
-          </a:prstGeom>
-          <a:noFill/>
-        </p:spPr>
-        <p:txBody>
-          <a:bodyPr wrap="square" anchor="t">
-            <a:spAutoFit/>
-          </a:bodyPr>
-          <a:lstStyle/>
-          <a:p>
-            <a:pPr algn="l">
-              <a:defRPr sz="1300" b="0">
                 <a:solidFill>
                   <a:srgbClr val="B4BED2"/>
                 </a:solidFill>
@@ -4869,35 +4467,74 @@
               </a:defRPr>
             </a:pPr>
             <a:r>
-              <a:t>参考：完整信息图（第 1 页为可编辑版）</a:t>
+              <a:t>单位经济</a:t>
             </a:r>
           </a:p>
         </p:txBody>
       </p:sp>
       <p:pic>
         <p:nvPicPr>
-          <p:cNvPr id="4" name="Picture 3" descr="ai-industry-chain-infographic-zh-16x9.png"/>
+          <p:cNvPr id="39" name="Picture 38" descr="04-pmf.png"/>
           <p:cNvPicPr>
             <a:picLocks noChangeAspect="1"/>
           </p:cNvPicPr>
           <p:nvPr/>
         </p:nvPicPr>
         <p:blipFill>
-          <a:blip r:embed="rId2"/>
+          <a:blip r:embed="rId15"/>
           <a:stretch>
             <a:fillRect/>
           </a:stretch>
         </p:blipFill>
         <p:spPr>
           <a:xfrm>
-            <a:off x="137160" y="457200"/>
-            <a:ext cx="11887200" cy="6686550"/>
+            <a:off x="11292840" y="5916168"/>
+            <a:ext cx="365760" cy="365760"/>
           </a:xfrm>
           <a:prstGeom prst="rect">
             <a:avLst/>
           </a:prstGeom>
         </p:spPr>
       </p:pic>
+      <p:sp>
+        <p:nvSpPr>
+          <p:cNvPr id="40" name="TextBox 39"/>
+          <p:cNvSpPr txBox="1"/>
+          <p:nvPr/>
+        </p:nvSpPr>
+        <p:spPr>
+          <a:xfrm>
+            <a:off x="10927080" y="6327648"/>
+            <a:ext cx="1188720" cy="320040"/>
+          </a:xfrm>
+          <a:prstGeom prst="rect">
+            <a:avLst/>
+          </a:prstGeom>
+          <a:noFill/>
+        </p:spPr>
+        <p:txBody>
+          <a:bodyPr wrap="square" anchor="t">
+            <a:spAutoFit/>
+          </a:bodyPr>
+          <a:lstStyle/>
+          <a:p>
+            <a:pPr algn="ctr">
+              <a:spcAft>
+                <a:spcPts val="200"/>
+              </a:spcAft>
+              <a:defRPr sz="1100" b="0">
+                <a:solidFill>
+                  <a:srgbClr val="B4BED2"/>
+                </a:solidFill>
+                <a:latin typeface="Microsoft YaHei"/>
+              </a:defRPr>
+            </a:pPr>
+            <a:r>
+              <a:t>产品契合</a:t>
+            </a:r>
+          </a:p>
+        </p:txBody>
+      </p:sp>
     </p:spTree>
   </p:cSld>
   <p:clrMapOvr>

--- a/AI-industry-chain-editable-16x9.pptx
+++ b/AI-industry-chain-editable-16x9.pptx
@@ -3393,33 +3393,91 @@
           </a:p>
         </p:txBody>
       </p:sp>
+      <p:grpSp>
+        <p:nvGrpSpPr>
+          <p:cNvPr id="11" name="IconGroup"/>
+          <p:cNvGrpSpPr/>
+          <p:nvPr/>
+        </p:nvGrpSpPr>
+        <p:grpSpPr>
+          <a:xfrm>
+            <a:off x="1023487" y="2679192"/>
+            <a:ext cx="713232" cy="713232"/>
+            <a:chOff x="1023487" y="2679192"/>
+            <a:chExt cx="713232" cy="713232"/>
+          </a:xfrm>
+        </p:grpSpPr>
+        <p:sp>
+          <p:nvSpPr>
+            <p:cNvPr id="9" name="Oval 8"/>
+            <p:cNvSpPr/>
+            <p:nvPr/>
+          </p:nvSpPr>
+          <p:spPr>
+            <a:xfrm>
+              <a:off x="1023487" y="2679192"/>
+              <a:ext cx="713232" cy="713232"/>
+            </a:xfrm>
+            <a:prstGeom prst="ellipse">
+              <a:avLst/>
+            </a:prstGeom>
+            <a:solidFill>
+              <a:srgbClr val="3B82F6"/>
+            </a:solidFill>
+            <a:ln>
+              <a:noFill/>
+            </a:ln>
+          </p:spPr>
+          <p:style>
+            <a:lnRef idx="1">
+              <a:schemeClr val="accent1"/>
+            </a:lnRef>
+            <a:fillRef idx="3">
+              <a:schemeClr val="accent1"/>
+            </a:fillRef>
+            <a:effectRef idx="2">
+              <a:schemeClr val="accent1"/>
+            </a:effectRef>
+            <a:fontRef idx="minor">
+              <a:schemeClr val="lt1"/>
+            </a:fontRef>
+          </p:style>
+          <p:txBody>
+            <a:bodyPr rtlCol="0" anchor="ctr"/>
+            <a:lstStyle/>
+            <a:p>
+              <a:pPr algn="ctr"/>
+            </a:p>
+          </p:txBody>
+        </p:sp>
+        <p:pic>
+          <p:nvPicPr>
+            <p:cNvPr id="10" name="Picture 9" descr="01-compute.png"/>
+            <p:cNvPicPr>
+              <a:picLocks noChangeAspect="1"/>
+            </p:cNvPicPr>
+            <p:nvPr/>
+          </p:nvPicPr>
+          <p:blipFill>
+            <a:blip r:embed="rId2"/>
+            <a:stretch>
+              <a:fillRect/>
+            </a:stretch>
+          </p:blipFill>
+          <p:spPr>
+            <a:xfrm>
+              <a:off x="1142359" y="2798064"/>
+              <a:ext cx="475488" cy="475488"/>
+            </a:xfrm>
+            <a:prstGeom prst="rect">
+              <a:avLst/>
+            </a:prstGeom>
+          </p:spPr>
+        </p:pic>
+      </p:grpSp>
       <p:pic>
         <p:nvPicPr>
-          <p:cNvPr id="9" name="Picture 8" descr="01-compute.png"/>
-          <p:cNvPicPr>
-            <a:picLocks noChangeAspect="1"/>
-          </p:cNvPicPr>
-          <p:nvPr/>
-        </p:nvPicPr>
-        <p:blipFill>
-          <a:blip r:embed="rId2"/>
-          <a:stretch>
-            <a:fillRect/>
-          </a:stretch>
-        </p:blipFill>
-        <p:spPr>
-          <a:xfrm>
-            <a:off x="1050919" y="2697480"/>
-            <a:ext cx="658368" cy="658368"/>
-          </a:xfrm>
-          <a:prstGeom prst="rect">
-            <a:avLst/>
-          </a:prstGeom>
-        </p:spPr>
-      </p:pic>
-      <p:pic>
-        <p:nvPicPr>
-          <p:cNvPr id="10" name="Picture 9" descr="01-compute.png"/>
+          <p:cNvPr id="12" name="Picture 11" descr="01-compute.png"/>
           <p:cNvPicPr>
             <a:picLocks noChangeAspect="1"/>
           </p:cNvPicPr>
@@ -3443,7 +3501,7 @@
       </p:pic>
       <p:sp>
         <p:nvSpPr>
-          <p:cNvPr id="11" name="Rounded Rectangle 10"/>
+          <p:cNvPr id="13" name="Rounded Rectangle 12"/>
           <p:cNvSpPr/>
           <p:nvPr/>
         </p:nvSpPr>
@@ -3490,7 +3548,7 @@
       </p:sp>
       <p:sp>
         <p:nvSpPr>
-          <p:cNvPr id="12" name="TextBox 11"/>
+          <p:cNvPr id="14" name="TextBox 13"/>
           <p:cNvSpPr txBox="1"/>
           <p:nvPr/>
         </p:nvSpPr>
@@ -3529,7 +3587,7 @@
       </p:sp>
       <p:sp>
         <p:nvSpPr>
-          <p:cNvPr id="13" name="TextBox 12"/>
+          <p:cNvPr id="15" name="TextBox 14"/>
           <p:cNvSpPr txBox="1"/>
           <p:nvPr/>
         </p:nvSpPr>
@@ -3582,33 +3640,91 @@
           </a:p>
         </p:txBody>
       </p:sp>
+      <p:grpSp>
+        <p:nvGrpSpPr>
+          <p:cNvPr id="18" name="IconGroup"/>
+          <p:cNvGrpSpPr/>
+          <p:nvPr/>
+        </p:nvGrpSpPr>
+        <p:grpSpPr>
+          <a:xfrm>
+            <a:off x="3381359" y="2679192"/>
+            <a:ext cx="713232" cy="713232"/>
+            <a:chOff x="3381359" y="2679192"/>
+            <a:chExt cx="713232" cy="713232"/>
+          </a:xfrm>
+        </p:grpSpPr>
+        <p:sp>
+          <p:nvSpPr>
+            <p:cNvPr id="16" name="Oval 15"/>
+            <p:cNvSpPr/>
+            <p:nvPr/>
+          </p:nvSpPr>
+          <p:spPr>
+            <a:xfrm>
+              <a:off x="3381359" y="2679192"/>
+              <a:ext cx="713232" cy="713232"/>
+            </a:xfrm>
+            <a:prstGeom prst="ellipse">
+              <a:avLst/>
+            </a:prstGeom>
+            <a:solidFill>
+              <a:srgbClr val="3B82F6"/>
+            </a:solidFill>
+            <a:ln>
+              <a:noFill/>
+            </a:ln>
+          </p:spPr>
+          <p:style>
+            <a:lnRef idx="1">
+              <a:schemeClr val="accent1"/>
+            </a:lnRef>
+            <a:fillRef idx="3">
+              <a:schemeClr val="accent1"/>
+            </a:fillRef>
+            <a:effectRef idx="2">
+              <a:schemeClr val="accent1"/>
+            </a:effectRef>
+            <a:fontRef idx="minor">
+              <a:schemeClr val="lt1"/>
+            </a:fontRef>
+          </p:style>
+          <p:txBody>
+            <a:bodyPr rtlCol="0" anchor="ctr"/>
+            <a:lstStyle/>
+            <a:p>
+              <a:pPr algn="ctr"/>
+            </a:p>
+          </p:txBody>
+        </p:sp>
+        <p:pic>
+          <p:nvPicPr>
+            <p:cNvPr id="17" name="Picture 16" descr="02-infra.png"/>
+            <p:cNvPicPr>
+              <a:picLocks noChangeAspect="1"/>
+            </p:cNvPicPr>
+            <p:nvPr/>
+          </p:nvPicPr>
+          <p:blipFill>
+            <a:blip r:embed="rId4"/>
+            <a:stretch>
+              <a:fillRect/>
+            </a:stretch>
+          </p:blipFill>
+          <p:spPr>
+            <a:xfrm>
+              <a:off x="3500231" y="2798064"/>
+              <a:ext cx="475488" cy="475488"/>
+            </a:xfrm>
+            <a:prstGeom prst="rect">
+              <a:avLst/>
+            </a:prstGeom>
+          </p:spPr>
+        </p:pic>
+      </p:grpSp>
       <p:pic>
         <p:nvPicPr>
-          <p:cNvPr id="14" name="Picture 13" descr="02-infra.png"/>
-          <p:cNvPicPr>
-            <a:picLocks noChangeAspect="1"/>
-          </p:cNvPicPr>
-          <p:nvPr/>
-        </p:nvPicPr>
-        <p:blipFill>
-          <a:blip r:embed="rId4"/>
-          <a:stretch>
-            <a:fillRect/>
-          </a:stretch>
-        </p:blipFill>
-        <p:spPr>
-          <a:xfrm>
-            <a:off x="3408791" y="2697480"/>
-            <a:ext cx="658368" cy="658368"/>
-          </a:xfrm>
-          <a:prstGeom prst="rect">
-            <a:avLst/>
-          </a:prstGeom>
-        </p:spPr>
-      </p:pic>
-      <p:pic>
-        <p:nvPicPr>
-          <p:cNvPr id="15" name="Picture 14" descr="02-infra.png"/>
+          <p:cNvPr id="19" name="Picture 18" descr="02-infra.png"/>
           <p:cNvPicPr>
             <a:picLocks noChangeAspect="1"/>
           </p:cNvPicPr>
@@ -3632,7 +3748,7 @@
       </p:pic>
       <p:sp>
         <p:nvSpPr>
-          <p:cNvPr id="16" name="Rounded Rectangle 15"/>
+          <p:cNvPr id="20" name="Rounded Rectangle 19"/>
           <p:cNvSpPr/>
           <p:nvPr/>
         </p:nvSpPr>
@@ -3679,7 +3795,7 @@
       </p:sp>
       <p:sp>
         <p:nvSpPr>
-          <p:cNvPr id="17" name="TextBox 16"/>
+          <p:cNvPr id="21" name="TextBox 20"/>
           <p:cNvSpPr txBox="1"/>
           <p:nvPr/>
         </p:nvSpPr>
@@ -3718,7 +3834,7 @@
       </p:sp>
       <p:sp>
         <p:nvSpPr>
-          <p:cNvPr id="18" name="TextBox 17"/>
+          <p:cNvPr id="22" name="TextBox 21"/>
           <p:cNvSpPr txBox="1"/>
           <p:nvPr/>
         </p:nvSpPr>
@@ -3771,33 +3887,91 @@
           </a:p>
         </p:txBody>
       </p:sp>
+      <p:grpSp>
+        <p:nvGrpSpPr>
+          <p:cNvPr id="25" name="IconGroup"/>
+          <p:cNvGrpSpPr/>
+          <p:nvPr/>
+        </p:nvGrpSpPr>
+        <p:grpSpPr>
+          <a:xfrm>
+            <a:off x="5739231" y="2679192"/>
+            <a:ext cx="713232" cy="713232"/>
+            <a:chOff x="5739231" y="2679192"/>
+            <a:chExt cx="713232" cy="713232"/>
+          </a:xfrm>
+        </p:grpSpPr>
+        <p:sp>
+          <p:nvSpPr>
+            <p:cNvPr id="23" name="Oval 22"/>
+            <p:cNvSpPr/>
+            <p:nvPr/>
+          </p:nvSpPr>
+          <p:spPr>
+            <a:xfrm>
+              <a:off x="5739231" y="2679192"/>
+              <a:ext cx="713232" cy="713232"/>
+            </a:xfrm>
+            <a:prstGeom prst="ellipse">
+              <a:avLst/>
+            </a:prstGeom>
+            <a:solidFill>
+              <a:srgbClr val="3B82F6"/>
+            </a:solidFill>
+            <a:ln>
+              <a:noFill/>
+            </a:ln>
+          </p:spPr>
+          <p:style>
+            <a:lnRef idx="1">
+              <a:schemeClr val="accent1"/>
+            </a:lnRef>
+            <a:fillRef idx="3">
+              <a:schemeClr val="accent1"/>
+            </a:fillRef>
+            <a:effectRef idx="2">
+              <a:schemeClr val="accent1"/>
+            </a:effectRef>
+            <a:fontRef idx="minor">
+              <a:schemeClr val="lt1"/>
+            </a:fontRef>
+          </p:style>
+          <p:txBody>
+            <a:bodyPr rtlCol="0" anchor="ctr"/>
+            <a:lstStyle/>
+            <a:p>
+              <a:pPr algn="ctr"/>
+            </a:p>
+          </p:txBody>
+        </p:sp>
+        <p:pic>
+          <p:nvPicPr>
+            <p:cNvPr id="24" name="Picture 23" descr="03-model.png"/>
+            <p:cNvPicPr>
+              <a:picLocks noChangeAspect="1"/>
+            </p:cNvPicPr>
+            <p:nvPr/>
+          </p:nvPicPr>
+          <p:blipFill>
+            <a:blip r:embed="rId6"/>
+            <a:stretch>
+              <a:fillRect/>
+            </a:stretch>
+          </p:blipFill>
+          <p:spPr>
+            <a:xfrm>
+              <a:off x="5858103" y="2798064"/>
+              <a:ext cx="475488" cy="475488"/>
+            </a:xfrm>
+            <a:prstGeom prst="rect">
+              <a:avLst/>
+            </a:prstGeom>
+          </p:spPr>
+        </p:pic>
+      </p:grpSp>
       <p:pic>
         <p:nvPicPr>
-          <p:cNvPr id="19" name="Picture 18" descr="03-model.png"/>
-          <p:cNvPicPr>
-            <a:picLocks noChangeAspect="1"/>
-          </p:cNvPicPr>
-          <p:nvPr/>
-        </p:nvPicPr>
-        <p:blipFill>
-          <a:blip r:embed="rId6"/>
-          <a:stretch>
-            <a:fillRect/>
-          </a:stretch>
-        </p:blipFill>
-        <p:spPr>
-          <a:xfrm>
-            <a:off x="5766663" y="2697480"/>
-            <a:ext cx="658368" cy="658368"/>
-          </a:xfrm>
-          <a:prstGeom prst="rect">
-            <a:avLst/>
-          </a:prstGeom>
-        </p:spPr>
-      </p:pic>
-      <p:pic>
-        <p:nvPicPr>
-          <p:cNvPr id="20" name="Picture 19" descr="03-model.png"/>
+          <p:cNvPr id="26" name="Picture 25" descr="03-model.png"/>
           <p:cNvPicPr>
             <a:picLocks noChangeAspect="1"/>
           </p:cNvPicPr>
@@ -3821,7 +3995,7 @@
       </p:pic>
       <p:sp>
         <p:nvSpPr>
-          <p:cNvPr id="21" name="Rounded Rectangle 20"/>
+          <p:cNvPr id="27" name="Rounded Rectangle 26"/>
           <p:cNvSpPr/>
           <p:nvPr/>
         </p:nvSpPr>
@@ -3868,7 +4042,7 @@
       </p:sp>
       <p:sp>
         <p:nvSpPr>
-          <p:cNvPr id="22" name="TextBox 21"/>
+          <p:cNvPr id="28" name="TextBox 27"/>
           <p:cNvSpPr txBox="1"/>
           <p:nvPr/>
         </p:nvSpPr>
@@ -3907,7 +4081,7 @@
       </p:sp>
       <p:sp>
         <p:nvSpPr>
-          <p:cNvPr id="23" name="TextBox 22"/>
+          <p:cNvPr id="29" name="TextBox 28"/>
           <p:cNvSpPr txBox="1"/>
           <p:nvPr/>
         </p:nvSpPr>
@@ -3960,33 +4134,91 @@
           </a:p>
         </p:txBody>
       </p:sp>
+      <p:grpSp>
+        <p:nvGrpSpPr>
+          <p:cNvPr id="32" name="IconGroup"/>
+          <p:cNvGrpSpPr/>
+          <p:nvPr/>
+        </p:nvGrpSpPr>
+        <p:grpSpPr>
+          <a:xfrm>
+            <a:off x="8097103" y="2679192"/>
+            <a:ext cx="713232" cy="713232"/>
+            <a:chOff x="8097103" y="2679192"/>
+            <a:chExt cx="713232" cy="713232"/>
+          </a:xfrm>
+        </p:grpSpPr>
+        <p:sp>
+          <p:nvSpPr>
+            <p:cNvPr id="30" name="Oval 29"/>
+            <p:cNvSpPr/>
+            <p:nvPr/>
+          </p:nvSpPr>
+          <p:spPr>
+            <a:xfrm>
+              <a:off x="8097103" y="2679192"/>
+              <a:ext cx="713232" cy="713232"/>
+            </a:xfrm>
+            <a:prstGeom prst="ellipse">
+              <a:avLst/>
+            </a:prstGeom>
+            <a:solidFill>
+              <a:srgbClr val="3B82F6"/>
+            </a:solidFill>
+            <a:ln>
+              <a:noFill/>
+            </a:ln>
+          </p:spPr>
+          <p:style>
+            <a:lnRef idx="1">
+              <a:schemeClr val="accent1"/>
+            </a:lnRef>
+            <a:fillRef idx="3">
+              <a:schemeClr val="accent1"/>
+            </a:fillRef>
+            <a:effectRef idx="2">
+              <a:schemeClr val="accent1"/>
+            </a:effectRef>
+            <a:fontRef idx="minor">
+              <a:schemeClr val="lt1"/>
+            </a:fontRef>
+          </p:style>
+          <p:txBody>
+            <a:bodyPr rtlCol="0" anchor="ctr"/>
+            <a:lstStyle/>
+            <a:p>
+              <a:pPr algn="ctr"/>
+            </a:p>
+          </p:txBody>
+        </p:sp>
+        <p:pic>
+          <p:nvPicPr>
+            <p:cNvPr id="31" name="Picture 30" descr="04-agent.png"/>
+            <p:cNvPicPr>
+              <a:picLocks noChangeAspect="1"/>
+            </p:cNvPicPr>
+            <p:nvPr/>
+          </p:nvPicPr>
+          <p:blipFill>
+            <a:blip r:embed="rId8"/>
+            <a:stretch>
+              <a:fillRect/>
+            </a:stretch>
+          </p:blipFill>
+          <p:spPr>
+            <a:xfrm>
+              <a:off x="8215975" y="2798064"/>
+              <a:ext cx="475488" cy="475488"/>
+            </a:xfrm>
+            <a:prstGeom prst="rect">
+              <a:avLst/>
+            </a:prstGeom>
+          </p:spPr>
+        </p:pic>
+      </p:grpSp>
       <p:pic>
         <p:nvPicPr>
-          <p:cNvPr id="24" name="Picture 23" descr="04-agent.png"/>
-          <p:cNvPicPr>
-            <a:picLocks noChangeAspect="1"/>
-          </p:cNvPicPr>
-          <p:nvPr/>
-        </p:nvPicPr>
-        <p:blipFill>
-          <a:blip r:embed="rId8"/>
-          <a:stretch>
-            <a:fillRect/>
-          </a:stretch>
-        </p:blipFill>
-        <p:spPr>
-          <a:xfrm>
-            <a:off x="8124535" y="2697480"/>
-            <a:ext cx="658368" cy="658368"/>
-          </a:xfrm>
-          <a:prstGeom prst="rect">
-            <a:avLst/>
-          </a:prstGeom>
-        </p:spPr>
-      </p:pic>
-      <p:pic>
-        <p:nvPicPr>
-          <p:cNvPr id="25" name="Picture 24" descr="04-agent.png"/>
+          <p:cNvPr id="33" name="Picture 32" descr="04-agent.png"/>
           <p:cNvPicPr>
             <a:picLocks noChangeAspect="1"/>
           </p:cNvPicPr>
@@ -4010,7 +4242,7 @@
       </p:pic>
       <p:sp>
         <p:nvSpPr>
-          <p:cNvPr id="26" name="Rounded Rectangle 25"/>
+          <p:cNvPr id="34" name="Rounded Rectangle 33"/>
           <p:cNvSpPr/>
           <p:nvPr/>
         </p:nvSpPr>
@@ -4057,7 +4289,7 @@
       </p:sp>
       <p:sp>
         <p:nvSpPr>
-          <p:cNvPr id="27" name="TextBox 26"/>
+          <p:cNvPr id="35" name="TextBox 34"/>
           <p:cNvSpPr txBox="1"/>
           <p:nvPr/>
         </p:nvSpPr>
@@ -4096,7 +4328,7 @@
       </p:sp>
       <p:sp>
         <p:nvSpPr>
-          <p:cNvPr id="28" name="TextBox 27"/>
+          <p:cNvPr id="36" name="TextBox 35"/>
           <p:cNvSpPr txBox="1"/>
           <p:nvPr/>
         </p:nvSpPr>
@@ -4149,33 +4381,91 @@
           </a:p>
         </p:txBody>
       </p:sp>
+      <p:grpSp>
+        <p:nvGrpSpPr>
+          <p:cNvPr id="39" name="IconGroup"/>
+          <p:cNvGrpSpPr/>
+          <p:nvPr/>
+        </p:nvGrpSpPr>
+        <p:grpSpPr>
+          <a:xfrm>
+            <a:off x="10454975" y="2679192"/>
+            <a:ext cx="713232" cy="713232"/>
+            <a:chOff x="10454975" y="2679192"/>
+            <a:chExt cx="713232" cy="713232"/>
+          </a:xfrm>
+        </p:grpSpPr>
+        <p:sp>
+          <p:nvSpPr>
+            <p:cNvPr id="37" name="Oval 36"/>
+            <p:cNvSpPr/>
+            <p:nvPr/>
+          </p:nvSpPr>
+          <p:spPr>
+            <a:xfrm>
+              <a:off x="10454975" y="2679192"/>
+              <a:ext cx="713232" cy="713232"/>
+            </a:xfrm>
+            <a:prstGeom prst="ellipse">
+              <a:avLst/>
+            </a:prstGeom>
+            <a:solidFill>
+              <a:srgbClr val="3B82F6"/>
+            </a:solidFill>
+            <a:ln>
+              <a:noFill/>
+            </a:ln>
+          </p:spPr>
+          <p:style>
+            <a:lnRef idx="1">
+              <a:schemeClr val="accent1"/>
+            </a:lnRef>
+            <a:fillRef idx="3">
+              <a:schemeClr val="accent1"/>
+            </a:fillRef>
+            <a:effectRef idx="2">
+              <a:schemeClr val="accent1"/>
+            </a:effectRef>
+            <a:fontRef idx="minor">
+              <a:schemeClr val="lt1"/>
+            </a:fontRef>
+          </p:style>
+          <p:txBody>
+            <a:bodyPr rtlCol="0" anchor="ctr"/>
+            <a:lstStyle/>
+            <a:p>
+              <a:pPr algn="ctr"/>
+            </a:p>
+          </p:txBody>
+        </p:sp>
+        <p:pic>
+          <p:nvPicPr>
+            <p:cNvPr id="38" name="Picture 37" descr="05-app.png"/>
+            <p:cNvPicPr>
+              <a:picLocks noChangeAspect="1"/>
+            </p:cNvPicPr>
+            <p:nvPr/>
+          </p:nvPicPr>
+          <p:blipFill>
+            <a:blip r:embed="rId10"/>
+            <a:stretch>
+              <a:fillRect/>
+            </a:stretch>
+          </p:blipFill>
+          <p:spPr>
+            <a:xfrm>
+              <a:off x="10573847" y="2798064"/>
+              <a:ext cx="475488" cy="475488"/>
+            </a:xfrm>
+            <a:prstGeom prst="rect">
+              <a:avLst/>
+            </a:prstGeom>
+          </p:spPr>
+        </p:pic>
+      </p:grpSp>
       <p:pic>
         <p:nvPicPr>
-          <p:cNvPr id="29" name="Picture 28" descr="05-app.png"/>
-          <p:cNvPicPr>
-            <a:picLocks noChangeAspect="1"/>
-          </p:cNvPicPr>
-          <p:nvPr/>
-        </p:nvPicPr>
-        <p:blipFill>
-          <a:blip r:embed="rId10"/>
-          <a:stretch>
-            <a:fillRect/>
-          </a:stretch>
-        </p:blipFill>
-        <p:spPr>
-          <a:xfrm>
-            <a:off x="10482407" y="2697480"/>
-            <a:ext cx="658368" cy="658368"/>
-          </a:xfrm>
-          <a:prstGeom prst="rect">
-            <a:avLst/>
-          </a:prstGeom>
-        </p:spPr>
-      </p:pic>
-      <p:pic>
-        <p:nvPicPr>
-          <p:cNvPr id="30" name="Picture 29" descr="05-app.png"/>
+          <p:cNvPr id="40" name="Picture 39" descr="05-app.png"/>
           <p:cNvPicPr>
             <a:picLocks noChangeAspect="1"/>
           </p:cNvPicPr>
@@ -4199,7 +4489,7 @@
       </p:pic>
       <p:sp>
         <p:nvSpPr>
-          <p:cNvPr id="31" name="Rectangle 30"/>
+          <p:cNvPr id="41" name="Rectangle 40"/>
           <p:cNvSpPr/>
           <p:nvPr/>
         </p:nvSpPr>
@@ -4242,7 +4532,7 @@
       </p:sp>
       <p:sp>
         <p:nvSpPr>
-          <p:cNvPr id="32" name="TextBox 31"/>
+          <p:cNvPr id="42" name="TextBox 41"/>
           <p:cNvSpPr txBox="1"/>
           <p:nvPr/>
         </p:nvSpPr>
@@ -4283,39 +4573,97 @@
           </a:p>
         </p:txBody>
       </p:sp>
-      <p:pic>
-        <p:nvPicPr>
-          <p:cNvPr id="33" name="Picture 32" descr="01-capex.png"/>
-          <p:cNvPicPr>
-            <a:picLocks noChangeAspect="1"/>
-          </p:cNvPicPr>
+      <p:grpSp>
+        <p:nvGrpSpPr>
+          <p:cNvPr id="45" name="IconGroup"/>
+          <p:cNvGrpSpPr/>
           <p:nvPr/>
-        </p:nvPicPr>
-        <p:blipFill>
-          <a:blip r:embed="rId12"/>
-          <a:stretch>
-            <a:fillRect/>
-          </a:stretch>
-        </p:blipFill>
-        <p:spPr>
-          <a:xfrm>
-            <a:off x="7315200" y="5916168"/>
-            <a:ext cx="365760" cy="365760"/>
-          </a:xfrm>
-          <a:prstGeom prst="rect">
-            <a:avLst/>
-          </a:prstGeom>
-        </p:spPr>
-      </p:pic>
-      <p:sp>
-        <p:nvSpPr>
-          <p:cNvPr id="34" name="TextBox 33"/>
+        </p:nvGrpSpPr>
+        <p:grpSpPr>
+          <a:xfrm>
+            <a:off x="7333488" y="5897880"/>
+            <a:ext cx="420624" cy="420624"/>
+            <a:chOff x="7333488" y="5897880"/>
+            <a:chExt cx="420624" cy="420624"/>
+          </a:xfrm>
+        </p:grpSpPr>
+        <p:sp>
+          <p:nvSpPr>
+            <p:cNvPr id="43" name="Oval 42"/>
+            <p:cNvSpPr/>
+            <p:nvPr/>
+          </p:nvSpPr>
+          <p:spPr>
+            <a:xfrm>
+              <a:off x="7333488" y="5897880"/>
+              <a:ext cx="420624" cy="420624"/>
+            </a:xfrm>
+            <a:prstGeom prst="ellipse">
+              <a:avLst/>
+            </a:prstGeom>
+            <a:noFill/>
+            <a:ln w="22225">
+              <a:solidFill>
+                <a:srgbClr val="3B82F6"/>
+              </a:solidFill>
+            </a:ln>
+          </p:spPr>
+          <p:style>
+            <a:lnRef idx="1">
+              <a:schemeClr val="accent1"/>
+            </a:lnRef>
+            <a:fillRef idx="3">
+              <a:schemeClr val="accent1"/>
+            </a:fillRef>
+            <a:effectRef idx="2">
+              <a:schemeClr val="accent1"/>
+            </a:effectRef>
+            <a:fontRef idx="minor">
+              <a:schemeClr val="lt1"/>
+            </a:fontRef>
+          </p:style>
+          <p:txBody>
+            <a:bodyPr rtlCol="0" anchor="ctr"/>
+            <a:lstStyle/>
+            <a:p>
+              <a:pPr algn="ctr"/>
+            </a:p>
+          </p:txBody>
+        </p:sp>
+        <p:pic>
+          <p:nvPicPr>
+            <p:cNvPr id="44" name="Picture 43" descr="01-capex.png"/>
+            <p:cNvPicPr>
+              <a:picLocks noChangeAspect="1"/>
+            </p:cNvPicPr>
+            <p:nvPr/>
+          </p:nvPicPr>
+          <p:blipFill>
+            <a:blip r:embed="rId12"/>
+            <a:stretch>
+              <a:fillRect/>
+            </a:stretch>
+          </p:blipFill>
+          <p:spPr>
+            <a:xfrm>
+              <a:off x="7397496" y="5961888"/>
+              <a:ext cx="292608" cy="292608"/>
+            </a:xfrm>
+            <a:prstGeom prst="rect">
+              <a:avLst/>
+            </a:prstGeom>
+          </p:spPr>
+        </p:pic>
+      </p:grpSp>
+      <p:sp>
+        <p:nvSpPr>
+          <p:cNvPr id="46" name="TextBox 45"/>
           <p:cNvSpPr txBox="1"/>
           <p:nvPr/>
         </p:nvSpPr>
         <p:spPr>
           <a:xfrm>
-            <a:off x="6949440" y="6327648"/>
+            <a:off x="6949440" y="6336792"/>
             <a:ext cx="1188720" cy="320040"/>
           </a:xfrm>
           <a:prstGeom prst="rect">
@@ -4346,39 +4694,97 @@
           </a:p>
         </p:txBody>
       </p:sp>
-      <p:pic>
-        <p:nvPicPr>
-          <p:cNvPr id="35" name="Picture 34" descr="02-latency.png"/>
-          <p:cNvPicPr>
-            <a:picLocks noChangeAspect="1"/>
-          </p:cNvPicPr>
+      <p:grpSp>
+        <p:nvGrpSpPr>
+          <p:cNvPr id="49" name="IconGroup"/>
+          <p:cNvGrpSpPr/>
           <p:nvPr/>
-        </p:nvPicPr>
-        <p:blipFill>
-          <a:blip r:embed="rId13"/>
-          <a:stretch>
-            <a:fillRect/>
-          </a:stretch>
-        </p:blipFill>
-        <p:spPr>
-          <a:xfrm>
-            <a:off x="8641080" y="5916168"/>
-            <a:ext cx="365760" cy="365760"/>
-          </a:xfrm>
-          <a:prstGeom prst="rect">
-            <a:avLst/>
-          </a:prstGeom>
-        </p:spPr>
-      </p:pic>
-      <p:sp>
-        <p:nvSpPr>
-          <p:cNvPr id="36" name="TextBox 35"/>
+        </p:nvGrpSpPr>
+        <p:grpSpPr>
+          <a:xfrm>
+            <a:off x="8659368" y="5897880"/>
+            <a:ext cx="420624" cy="420624"/>
+            <a:chOff x="8659368" y="5897880"/>
+            <a:chExt cx="420624" cy="420624"/>
+          </a:xfrm>
+        </p:grpSpPr>
+        <p:sp>
+          <p:nvSpPr>
+            <p:cNvPr id="47" name="Oval 46"/>
+            <p:cNvSpPr/>
+            <p:nvPr/>
+          </p:nvSpPr>
+          <p:spPr>
+            <a:xfrm>
+              <a:off x="8659368" y="5897880"/>
+              <a:ext cx="420624" cy="420624"/>
+            </a:xfrm>
+            <a:prstGeom prst="ellipse">
+              <a:avLst/>
+            </a:prstGeom>
+            <a:noFill/>
+            <a:ln w="22225">
+              <a:solidFill>
+                <a:srgbClr val="3B82F6"/>
+              </a:solidFill>
+            </a:ln>
+          </p:spPr>
+          <p:style>
+            <a:lnRef idx="1">
+              <a:schemeClr val="accent1"/>
+            </a:lnRef>
+            <a:fillRef idx="3">
+              <a:schemeClr val="accent1"/>
+            </a:fillRef>
+            <a:effectRef idx="2">
+              <a:schemeClr val="accent1"/>
+            </a:effectRef>
+            <a:fontRef idx="minor">
+              <a:schemeClr val="lt1"/>
+            </a:fontRef>
+          </p:style>
+          <p:txBody>
+            <a:bodyPr rtlCol="0" anchor="ctr"/>
+            <a:lstStyle/>
+            <a:p>
+              <a:pPr algn="ctr"/>
+            </a:p>
+          </p:txBody>
+        </p:sp>
+        <p:pic>
+          <p:nvPicPr>
+            <p:cNvPr id="48" name="Picture 47" descr="02-latency.png"/>
+            <p:cNvPicPr>
+              <a:picLocks noChangeAspect="1"/>
+            </p:cNvPicPr>
+            <p:nvPr/>
+          </p:nvPicPr>
+          <p:blipFill>
+            <a:blip r:embed="rId13"/>
+            <a:stretch>
+              <a:fillRect/>
+            </a:stretch>
+          </p:blipFill>
+          <p:spPr>
+            <a:xfrm>
+              <a:off x="8723376" y="5961888"/>
+              <a:ext cx="292608" cy="292608"/>
+            </a:xfrm>
+            <a:prstGeom prst="rect">
+              <a:avLst/>
+            </a:prstGeom>
+          </p:spPr>
+        </p:pic>
+      </p:grpSp>
+      <p:sp>
+        <p:nvSpPr>
+          <p:cNvPr id="50" name="TextBox 49"/>
           <p:cNvSpPr txBox="1"/>
           <p:nvPr/>
         </p:nvSpPr>
         <p:spPr>
           <a:xfrm>
-            <a:off x="8275320" y="6327648"/>
+            <a:off x="8275320" y="6336792"/>
             <a:ext cx="1188720" cy="320040"/>
           </a:xfrm>
           <a:prstGeom prst="rect">
@@ -4409,39 +4815,97 @@
           </a:p>
         </p:txBody>
       </p:sp>
-      <p:pic>
-        <p:nvPicPr>
-          <p:cNvPr id="37" name="Picture 36" descr="03-unit.png"/>
-          <p:cNvPicPr>
-            <a:picLocks noChangeAspect="1"/>
-          </p:cNvPicPr>
+      <p:grpSp>
+        <p:nvGrpSpPr>
+          <p:cNvPr id="53" name="IconGroup"/>
+          <p:cNvGrpSpPr/>
           <p:nvPr/>
-        </p:nvPicPr>
-        <p:blipFill>
-          <a:blip r:embed="rId14"/>
-          <a:stretch>
-            <a:fillRect/>
-          </a:stretch>
-        </p:blipFill>
-        <p:spPr>
-          <a:xfrm>
-            <a:off x="9966960" y="5916168"/>
-            <a:ext cx="365760" cy="365760"/>
-          </a:xfrm>
-          <a:prstGeom prst="rect">
-            <a:avLst/>
-          </a:prstGeom>
-        </p:spPr>
-      </p:pic>
-      <p:sp>
-        <p:nvSpPr>
-          <p:cNvPr id="38" name="TextBox 37"/>
+        </p:nvGrpSpPr>
+        <p:grpSpPr>
+          <a:xfrm>
+            <a:off x="9985248" y="5897880"/>
+            <a:ext cx="420624" cy="420624"/>
+            <a:chOff x="9985248" y="5897880"/>
+            <a:chExt cx="420624" cy="420624"/>
+          </a:xfrm>
+        </p:grpSpPr>
+        <p:sp>
+          <p:nvSpPr>
+            <p:cNvPr id="51" name="Oval 50"/>
+            <p:cNvSpPr/>
+            <p:nvPr/>
+          </p:nvSpPr>
+          <p:spPr>
+            <a:xfrm>
+              <a:off x="9985248" y="5897880"/>
+              <a:ext cx="420624" cy="420624"/>
+            </a:xfrm>
+            <a:prstGeom prst="ellipse">
+              <a:avLst/>
+            </a:prstGeom>
+            <a:noFill/>
+            <a:ln w="22225">
+              <a:solidFill>
+                <a:srgbClr val="3B82F6"/>
+              </a:solidFill>
+            </a:ln>
+          </p:spPr>
+          <p:style>
+            <a:lnRef idx="1">
+              <a:schemeClr val="accent1"/>
+            </a:lnRef>
+            <a:fillRef idx="3">
+              <a:schemeClr val="accent1"/>
+            </a:fillRef>
+            <a:effectRef idx="2">
+              <a:schemeClr val="accent1"/>
+            </a:effectRef>
+            <a:fontRef idx="minor">
+              <a:schemeClr val="lt1"/>
+            </a:fontRef>
+          </p:style>
+          <p:txBody>
+            <a:bodyPr rtlCol="0" anchor="ctr"/>
+            <a:lstStyle/>
+            <a:p>
+              <a:pPr algn="ctr"/>
+            </a:p>
+          </p:txBody>
+        </p:sp>
+        <p:pic>
+          <p:nvPicPr>
+            <p:cNvPr id="52" name="Picture 51" descr="03-unit.png"/>
+            <p:cNvPicPr>
+              <a:picLocks noChangeAspect="1"/>
+            </p:cNvPicPr>
+            <p:nvPr/>
+          </p:nvPicPr>
+          <p:blipFill>
+            <a:blip r:embed="rId14"/>
+            <a:stretch>
+              <a:fillRect/>
+            </a:stretch>
+          </p:blipFill>
+          <p:spPr>
+            <a:xfrm>
+              <a:off x="10049256" y="5961888"/>
+              <a:ext cx="292608" cy="292608"/>
+            </a:xfrm>
+            <a:prstGeom prst="rect">
+              <a:avLst/>
+            </a:prstGeom>
+          </p:spPr>
+        </p:pic>
+      </p:grpSp>
+      <p:sp>
+        <p:nvSpPr>
+          <p:cNvPr id="54" name="TextBox 53"/>
           <p:cNvSpPr txBox="1"/>
           <p:nvPr/>
         </p:nvSpPr>
         <p:spPr>
           <a:xfrm>
-            <a:off x="9601200" y="6327648"/>
+            <a:off x="9601200" y="6336792"/>
             <a:ext cx="1188720" cy="320040"/>
           </a:xfrm>
           <a:prstGeom prst="rect">
@@ -4472,39 +4936,97 @@
           </a:p>
         </p:txBody>
       </p:sp>
-      <p:pic>
-        <p:nvPicPr>
-          <p:cNvPr id="39" name="Picture 38" descr="04-pmf.png"/>
-          <p:cNvPicPr>
-            <a:picLocks noChangeAspect="1"/>
-          </p:cNvPicPr>
+      <p:grpSp>
+        <p:nvGrpSpPr>
+          <p:cNvPr id="57" name="IconGroup"/>
+          <p:cNvGrpSpPr/>
           <p:nvPr/>
-        </p:nvPicPr>
-        <p:blipFill>
-          <a:blip r:embed="rId15"/>
-          <a:stretch>
-            <a:fillRect/>
-          </a:stretch>
-        </p:blipFill>
-        <p:spPr>
-          <a:xfrm>
-            <a:off x="11292840" y="5916168"/>
-            <a:ext cx="365760" cy="365760"/>
-          </a:xfrm>
-          <a:prstGeom prst="rect">
-            <a:avLst/>
-          </a:prstGeom>
-        </p:spPr>
-      </p:pic>
-      <p:sp>
-        <p:nvSpPr>
-          <p:cNvPr id="40" name="TextBox 39"/>
+        </p:nvGrpSpPr>
+        <p:grpSpPr>
+          <a:xfrm>
+            <a:off x="11311128" y="5897880"/>
+            <a:ext cx="420624" cy="420624"/>
+            <a:chOff x="11311128" y="5897880"/>
+            <a:chExt cx="420624" cy="420624"/>
+          </a:xfrm>
+        </p:grpSpPr>
+        <p:sp>
+          <p:nvSpPr>
+            <p:cNvPr id="55" name="Oval 54"/>
+            <p:cNvSpPr/>
+            <p:nvPr/>
+          </p:nvSpPr>
+          <p:spPr>
+            <a:xfrm>
+              <a:off x="11311128" y="5897880"/>
+              <a:ext cx="420624" cy="420624"/>
+            </a:xfrm>
+            <a:prstGeom prst="ellipse">
+              <a:avLst/>
+            </a:prstGeom>
+            <a:noFill/>
+            <a:ln w="22225">
+              <a:solidFill>
+                <a:srgbClr val="3B82F6"/>
+              </a:solidFill>
+            </a:ln>
+          </p:spPr>
+          <p:style>
+            <a:lnRef idx="1">
+              <a:schemeClr val="accent1"/>
+            </a:lnRef>
+            <a:fillRef idx="3">
+              <a:schemeClr val="accent1"/>
+            </a:fillRef>
+            <a:effectRef idx="2">
+              <a:schemeClr val="accent1"/>
+            </a:effectRef>
+            <a:fontRef idx="minor">
+              <a:schemeClr val="lt1"/>
+            </a:fontRef>
+          </p:style>
+          <p:txBody>
+            <a:bodyPr rtlCol="0" anchor="ctr"/>
+            <a:lstStyle/>
+            <a:p>
+              <a:pPr algn="ctr"/>
+            </a:p>
+          </p:txBody>
+        </p:sp>
+        <p:pic>
+          <p:nvPicPr>
+            <p:cNvPr id="56" name="Picture 55" descr="04-pmf.png"/>
+            <p:cNvPicPr>
+              <a:picLocks noChangeAspect="1"/>
+            </p:cNvPicPr>
+            <p:nvPr/>
+          </p:nvPicPr>
+          <p:blipFill>
+            <a:blip r:embed="rId15"/>
+            <a:stretch>
+              <a:fillRect/>
+            </a:stretch>
+          </p:blipFill>
+          <p:spPr>
+            <a:xfrm>
+              <a:off x="11375136" y="5961888"/>
+              <a:ext cx="292608" cy="292608"/>
+            </a:xfrm>
+            <a:prstGeom prst="rect">
+              <a:avLst/>
+            </a:prstGeom>
+          </p:spPr>
+        </p:pic>
+      </p:grpSp>
+      <p:sp>
+        <p:nvSpPr>
+          <p:cNvPr id="58" name="TextBox 57"/>
           <p:cNvSpPr txBox="1"/>
           <p:nvPr/>
         </p:nvSpPr>
         <p:spPr>
           <a:xfrm>
-            <a:off x="10927080" y="6327648"/>
+            <a:off x="10927080" y="6336792"/>
             <a:ext cx="1188720" cy="320040"/>
           </a:xfrm>
           <a:prstGeom prst="rect">
